--- a/examples/templates/es/cv_template.pptx
+++ b/examples/templates/es/cv_template.pptx
@@ -6,8 +6,9 @@
   </p:sldMasterIdLst>
   <p:sldIdLst>
     <p:sldId id="256" r:id="rId3"/>
+    <p:sldId id="257" r:id="rId4"/>
   </p:sldIdLst>
-  <p:sldSz cx="9144000" cy="6858000"/>
+  <p:sldSz cx="7559675" cy="10691813"/>
   <p:notesSz cx="7559675" cy="10691813"/>
 </p:presentation>
 </file>
@@ -48,8 +49,8 @@
         </p:nvSpPr>
         <p:spPr>
           <a:xfrm>
-            <a:off x="685800" y="2130480"/>
-            <a:ext cx="7772040" cy="1469520"/>
+            <a:off x="566640" y="3321000"/>
+            <a:ext cx="6425640" cy="2291040"/>
           </a:xfrm>
           <a:prstGeom prst="rect">
             <a:avLst/>
@@ -104,8 +105,8 @@
         </p:nvSpPr>
         <p:spPr>
           <a:xfrm>
-            <a:off x="457200" y="6356520"/>
-            <a:ext cx="2133360" cy="364680"/>
+            <a:off x="378000" y="9909720"/>
+            <a:ext cx="1763640" cy="568800"/>
           </a:xfrm>
           <a:prstGeom prst="rect">
             <a:avLst/>
@@ -155,7 +156,7 @@
                 <a:uFillTx/>
                 <a:latin typeface="Calibri"/>
               </a:rPr>
-              <a:t>&lt;Datum/Uhrzeit&gt;</a:t>
+              <a:t> </a:t>
             </a:r>
             <a:endParaRPr lang="de-DE" sz="1200" b="0" u="none" strike="noStrike">
               <a:solidFill>
@@ -180,8 +181,8 @@
         </p:nvSpPr>
         <p:spPr>
           <a:xfrm>
-            <a:off x="3124080" y="6356520"/>
-            <a:ext cx="2895120" cy="364680"/>
+            <a:off x="2582640" y="9909720"/>
+            <a:ext cx="2393640" cy="568800"/>
           </a:xfrm>
           <a:prstGeom prst="rect">
             <a:avLst/>
@@ -221,7 +222,7 @@
                 <a:uFillTx/>
                 <a:latin typeface="Times New Roman"/>
               </a:rPr>
-              <a:t>&lt;Fußzeile&gt;</a:t>
+              <a:t> </a:t>
             </a:r>
             <a:endParaRPr lang="de-DE" sz="1400" b="0" u="none" strike="noStrike">
               <a:solidFill>
@@ -246,8 +247,8 @@
         </p:nvSpPr>
         <p:spPr>
           <a:xfrm>
-            <a:off x="6553080" y="6356520"/>
-            <a:ext cx="2133360" cy="364680"/>
+            <a:off x="5417640" y="9909720"/>
+            <a:ext cx="1763640" cy="568800"/>
           </a:xfrm>
           <a:prstGeom prst="rect">
             <a:avLst/>
@@ -286,7 +287,7 @@
               </a:lnSpc>
               <a:buNone/>
             </a:pPr>
-            <a:fld id="{4A1ED424-31C2-42CA-8A07-5762DB4F1576}" type="slidenum">
+            <a:fld id="{0728DF0F-E918-4264-9C22-0C9F5CF9A001}" type="slidenum">
               <a:rPr lang="en-US" sz="1200" b="0" u="none" strike="noStrike">
                 <a:solidFill>
                   <a:schemeClr val="dk1">
@@ -297,7 +298,7 @@
                 <a:uFillTx/>
                 <a:latin typeface="Calibri"/>
               </a:rPr>
-              <a:t>&lt;Foliennummer&gt;</a:t>
+              <a:t>1</a:t>
             </a:fld>
             <a:endParaRPr lang="de-DE" sz="1200" b="0" u="none" strike="noStrike">
               <a:solidFill>
@@ -306,6 +307,259 @@
               <a:effectLst/>
               <a:uFillTx/>
               <a:latin typeface="Times New Roman"/>
+            </a:endParaRPr>
+          </a:p>
+        </p:txBody>
+      </p:sp>
+      <p:sp>
+        <p:nvSpPr>
+          <p:cNvPr id="6" name="PlaceHolder 5"/>
+          <p:cNvSpPr>
+            <a:spLocks noGrp="1"/>
+          </p:cNvSpPr>
+          <p:nvPr>
+            <p:ph type="body"/>
+          </p:nvPr>
+        </p:nvSpPr>
+        <p:spPr>
+          <a:xfrm>
+            <a:off x="378000" y="2501640"/>
+            <a:ext cx="6803640" cy="6201000"/>
+          </a:xfrm>
+          <a:prstGeom prst="rect">
+            <a:avLst/>
+          </a:prstGeom>
+          <a:noFill/>
+          <a:ln w="0">
+            <a:noFill/>
+          </a:ln>
+        </p:spPr>
+        <p:txBody>
+          <a:bodyPr lIns="0" rIns="0" tIns="0" bIns="0" anchor="t">
+            <a:normAutofit/>
+          </a:bodyPr>
+          <a:p>
+            <a:pPr marL="432000" indent="-324000">
+              <a:spcBef>
+                <a:spcPts val="2001"/>
+              </a:spcBef>
+              <a:buClr>
+                <a:srgbClr val="000000"/>
+              </a:buClr>
+              <a:buSzPct val="45000"/>
+              <a:buFont typeface="Wingdings" charset="2"/>
+              <a:buChar char=""/>
+            </a:pPr>
+            <a:r>
+              <a:rPr lang="en-US" sz="4520" b="0" u="none" strike="noStrike">
+                <a:solidFill>
+                  <a:schemeClr val="dk1"/>
+                </a:solidFill>
+                <a:effectLst/>
+                <a:uFillTx/>
+                <a:latin typeface="Calibri"/>
+              </a:rPr>
+              <a:t>Format des Gliederungstextes durch Klicken bearbeiten</a:t>
+            </a:r>
+            <a:endParaRPr lang="en-US" sz="4520" b="0" u="none" strike="noStrike">
+              <a:solidFill>
+                <a:schemeClr val="dk1"/>
+              </a:solidFill>
+              <a:effectLst/>
+              <a:uFillTx/>
+              <a:latin typeface="Calibri"/>
+            </a:endParaRPr>
+          </a:p>
+          <a:p>
+            <a:pPr marL="864000" lvl="1" indent="-324000">
+              <a:spcBef>
+                <a:spcPts val="1602"/>
+              </a:spcBef>
+              <a:buClr>
+                <a:srgbClr val="000000"/>
+              </a:buClr>
+              <a:buSzPct val="75000"/>
+              <a:buFont typeface="Symbol" charset="2"/>
+              <a:buChar char=""/>
+            </a:pPr>
+            <a:r>
+              <a:rPr lang="en-US" sz="3390" b="0" u="none" strike="noStrike">
+                <a:solidFill>
+                  <a:schemeClr val="dk1"/>
+                </a:solidFill>
+                <a:effectLst/>
+                <a:uFillTx/>
+                <a:latin typeface="Calibri"/>
+              </a:rPr>
+              <a:t>Zweite Gliederungsebene</a:t>
+            </a:r>
+            <a:endParaRPr lang="en-US" sz="3390" b="0" u="none" strike="noStrike">
+              <a:solidFill>
+                <a:schemeClr val="dk1"/>
+              </a:solidFill>
+              <a:effectLst/>
+              <a:uFillTx/>
+              <a:latin typeface="Calibri"/>
+            </a:endParaRPr>
+          </a:p>
+          <a:p>
+            <a:pPr marL="1296000" lvl="2" indent="-288000">
+              <a:spcBef>
+                <a:spcPts val="1202"/>
+              </a:spcBef>
+              <a:buClr>
+                <a:srgbClr val="000000"/>
+              </a:buClr>
+              <a:buSzPct val="45000"/>
+              <a:buFont typeface="Wingdings" charset="2"/>
+              <a:buChar char=""/>
+            </a:pPr>
+            <a:r>
+              <a:rPr lang="en-US" sz="2830" b="0" u="none" strike="noStrike">
+                <a:solidFill>
+                  <a:schemeClr val="dk1"/>
+                </a:solidFill>
+                <a:effectLst/>
+                <a:uFillTx/>
+                <a:latin typeface="Calibri"/>
+              </a:rPr>
+              <a:t>Dritte Gliederungsebene</a:t>
+            </a:r>
+            <a:endParaRPr lang="en-US" sz="2830" b="0" u="none" strike="noStrike">
+              <a:solidFill>
+                <a:schemeClr val="dk1"/>
+              </a:solidFill>
+              <a:effectLst/>
+              <a:uFillTx/>
+              <a:latin typeface="Calibri"/>
+            </a:endParaRPr>
+          </a:p>
+          <a:p>
+            <a:pPr marL="1728000" lvl="3" indent="-216000">
+              <a:spcBef>
+                <a:spcPts val="799"/>
+              </a:spcBef>
+              <a:buClr>
+                <a:srgbClr val="000000"/>
+              </a:buClr>
+              <a:buSzPct val="75000"/>
+              <a:buFont typeface="Symbol" charset="2"/>
+              <a:buChar char=""/>
+            </a:pPr>
+            <a:r>
+              <a:rPr lang="en-US" sz="2830" b="0" u="none" strike="noStrike">
+                <a:solidFill>
+                  <a:schemeClr val="dk1"/>
+                </a:solidFill>
+                <a:effectLst/>
+                <a:uFillTx/>
+                <a:latin typeface="Calibri"/>
+              </a:rPr>
+              <a:t>Vierte Gliederungsebene</a:t>
+            </a:r>
+            <a:endParaRPr lang="en-US" sz="2830" b="0" u="none" strike="noStrike">
+              <a:solidFill>
+                <a:schemeClr val="dk1"/>
+              </a:solidFill>
+              <a:effectLst/>
+              <a:uFillTx/>
+              <a:latin typeface="Calibri"/>
+            </a:endParaRPr>
+          </a:p>
+          <a:p>
+            <a:pPr marL="2160000" lvl="4" indent="-216000">
+              <a:spcBef>
+                <a:spcPts val="400"/>
+              </a:spcBef>
+              <a:buClr>
+                <a:srgbClr val="000000"/>
+              </a:buClr>
+              <a:buSzPct val="45000"/>
+              <a:buFont typeface="Wingdings" charset="2"/>
+              <a:buChar char=""/>
+            </a:pPr>
+            <a:r>
+              <a:rPr lang="en-US" sz="2830" b="0" u="none" strike="noStrike">
+                <a:solidFill>
+                  <a:schemeClr val="dk1"/>
+                </a:solidFill>
+                <a:effectLst/>
+                <a:uFillTx/>
+                <a:latin typeface="Calibri"/>
+              </a:rPr>
+              <a:t>Fünfte Gliederungsebene</a:t>
+            </a:r>
+            <a:endParaRPr lang="en-US" sz="2830" b="0" u="none" strike="noStrike">
+              <a:solidFill>
+                <a:schemeClr val="dk1"/>
+              </a:solidFill>
+              <a:effectLst/>
+              <a:uFillTx/>
+              <a:latin typeface="Calibri"/>
+            </a:endParaRPr>
+          </a:p>
+          <a:p>
+            <a:pPr marL="2592000" lvl="5" indent="-216000">
+              <a:spcBef>
+                <a:spcPts val="400"/>
+              </a:spcBef>
+              <a:buClr>
+                <a:srgbClr val="000000"/>
+              </a:buClr>
+              <a:buSzPct val="45000"/>
+              <a:buFont typeface="Wingdings" charset="2"/>
+              <a:buChar char=""/>
+            </a:pPr>
+            <a:r>
+              <a:rPr lang="en-US" sz="2830" b="0" u="none" strike="noStrike">
+                <a:solidFill>
+                  <a:schemeClr val="dk1"/>
+                </a:solidFill>
+                <a:effectLst/>
+                <a:uFillTx/>
+                <a:latin typeface="Calibri"/>
+              </a:rPr>
+              <a:t>Sechste Gliederungsebene</a:t>
+            </a:r>
+            <a:endParaRPr lang="en-US" sz="2830" b="0" u="none" strike="noStrike">
+              <a:solidFill>
+                <a:schemeClr val="dk1"/>
+              </a:solidFill>
+              <a:effectLst/>
+              <a:uFillTx/>
+              <a:latin typeface="Calibri"/>
+            </a:endParaRPr>
+          </a:p>
+          <a:p>
+            <a:pPr marL="3024000" lvl="6" indent="-216000">
+              <a:spcBef>
+                <a:spcPts val="400"/>
+              </a:spcBef>
+              <a:buClr>
+                <a:srgbClr val="000000"/>
+              </a:buClr>
+              <a:buSzPct val="45000"/>
+              <a:buFont typeface="Wingdings" charset="2"/>
+              <a:buChar char=""/>
+            </a:pPr>
+            <a:r>
+              <a:rPr lang="en-US" sz="2830" b="0" u="none" strike="noStrike">
+                <a:solidFill>
+                  <a:schemeClr val="dk1"/>
+                </a:solidFill>
+                <a:effectLst/>
+                <a:uFillTx/>
+                <a:latin typeface="Calibri"/>
+              </a:rPr>
+              <a:t>Siebte Gliederungsebene</a:t>
+            </a:r>
+            <a:endParaRPr lang="en-US" sz="2830" b="0" u="none" strike="noStrike">
+              <a:solidFill>
+                <a:schemeClr val="dk1"/>
+              </a:solidFill>
+              <a:effectLst/>
+              <a:uFillTx/>
+              <a:latin typeface="Calibri"/>
             </a:endParaRPr>
           </a:p>
         </p:txBody>
@@ -341,7 +595,7 @@
       </p:grpSpPr>
       <p:sp>
         <p:nvSpPr>
-          <p:cNvPr id="47" name="PlaceHolder 1"/>
+          <p:cNvPr id="51" name="PlaceHolder 1"/>
           <p:cNvSpPr>
             <a:spLocks noGrp="1"/>
           </p:cNvSpPr>
@@ -351,8 +605,8 @@
         </p:nvSpPr>
         <p:spPr>
           <a:xfrm>
-            <a:off x="457200" y="272880"/>
-            <a:ext cx="3007800" cy="1161720"/>
+            <a:off x="378000" y="424800"/>
+            <a:ext cx="2486520" cy="1811160"/>
           </a:xfrm>
           <a:prstGeom prst="rect">
             <a:avLst/>
@@ -397,7 +651,7 @@
       </p:sp>
       <p:sp>
         <p:nvSpPr>
-          <p:cNvPr id="48" name="PlaceHolder 2"/>
+          <p:cNvPr id="52" name="PlaceHolder 2"/>
           <p:cNvSpPr>
             <a:spLocks noGrp="1"/>
           </p:cNvSpPr>
@@ -407,8 +661,8 @@
         </p:nvSpPr>
         <p:spPr>
           <a:xfrm>
-            <a:off x="3575160" y="272880"/>
-            <a:ext cx="5111280" cy="5852880"/>
+            <a:off x="2955600" y="424800"/>
+            <a:ext cx="4226040" cy="9124920"/>
           </a:xfrm>
           <a:prstGeom prst="rect">
             <a:avLst/>
@@ -596,7 +850,7 @@
       </p:sp>
       <p:sp>
         <p:nvSpPr>
-          <p:cNvPr id="49" name="PlaceHolder 3"/>
+          <p:cNvPr id="53" name="PlaceHolder 3"/>
           <p:cNvSpPr>
             <a:spLocks noGrp="1"/>
           </p:cNvSpPr>
@@ -606,8 +860,8 @@
         </p:nvSpPr>
         <p:spPr>
           <a:xfrm>
-            <a:off x="457200" y="1434960"/>
-            <a:ext cx="3007800" cy="4690800"/>
+            <a:off x="378000" y="2237040"/>
+            <a:ext cx="2486520" cy="7313400"/>
           </a:xfrm>
           <a:prstGeom prst="rect">
             <a:avLst/>
@@ -658,7 +912,7 @@
       </p:sp>
       <p:sp>
         <p:nvSpPr>
-          <p:cNvPr id="50" name="PlaceHolder 4"/>
+          <p:cNvPr id="54" name="PlaceHolder 4"/>
           <p:cNvSpPr>
             <a:spLocks noGrp="1"/>
           </p:cNvSpPr>
@@ -668,8 +922,8 @@
         </p:nvSpPr>
         <p:spPr>
           <a:xfrm>
-            <a:off x="457200" y="6356520"/>
-            <a:ext cx="2133360" cy="364680"/>
+            <a:off x="378000" y="9909720"/>
+            <a:ext cx="1763640" cy="568800"/>
           </a:xfrm>
           <a:prstGeom prst="rect">
             <a:avLst/>
@@ -734,7 +988,7 @@
       </p:sp>
       <p:sp>
         <p:nvSpPr>
-          <p:cNvPr id="51" name="PlaceHolder 5"/>
+          <p:cNvPr id="55" name="PlaceHolder 5"/>
           <p:cNvSpPr>
             <a:spLocks noGrp="1"/>
           </p:cNvSpPr>
@@ -744,8 +998,8 @@
         </p:nvSpPr>
         <p:spPr>
           <a:xfrm>
-            <a:off x="3124080" y="6356520"/>
-            <a:ext cx="2895120" cy="364680"/>
+            <a:off x="2582640" y="9909720"/>
+            <a:ext cx="2393640" cy="568800"/>
           </a:xfrm>
           <a:prstGeom prst="rect">
             <a:avLst/>
@@ -800,7 +1054,7 @@
       </p:sp>
       <p:sp>
         <p:nvSpPr>
-          <p:cNvPr id="52" name="PlaceHolder 6"/>
+          <p:cNvPr id="56" name="PlaceHolder 6"/>
           <p:cNvSpPr>
             <a:spLocks noGrp="1"/>
           </p:cNvSpPr>
@@ -810,8 +1064,8 @@
         </p:nvSpPr>
         <p:spPr>
           <a:xfrm>
-            <a:off x="6553080" y="6356520"/>
-            <a:ext cx="2133360" cy="364680"/>
+            <a:off x="5417640" y="9909720"/>
+            <a:ext cx="1763640" cy="568800"/>
           </a:xfrm>
           <a:prstGeom prst="rect">
             <a:avLst/>
@@ -850,7 +1104,7 @@
               </a:lnSpc>
               <a:buNone/>
             </a:pPr>
-            <a:fld id="{578EA694-1FF2-475B-8483-65E361B797DC}" type="slidenum">
+            <a:fld id="{C2E4E75B-FC8D-49A8-9ED9-EC1429C2F1E4}" type="slidenum">
               <a:rPr lang="en-US" sz="1200" b="0" u="none" strike="noStrike">
                 <a:solidFill>
                   <a:schemeClr val="dk1">
@@ -905,7 +1159,7 @@
       </p:grpSpPr>
       <p:sp>
         <p:nvSpPr>
-          <p:cNvPr id="53" name="PlaceHolder 1"/>
+          <p:cNvPr id="57" name="PlaceHolder 1"/>
           <p:cNvSpPr>
             <a:spLocks noGrp="1"/>
           </p:cNvSpPr>
@@ -915,8 +1169,8 @@
         </p:nvSpPr>
         <p:spPr>
           <a:xfrm>
-            <a:off x="1792440" y="4800600"/>
-            <a:ext cx="5486040" cy="566280"/>
+            <a:off x="1481400" y="7484400"/>
+            <a:ext cx="4535640" cy="882720"/>
           </a:xfrm>
           <a:prstGeom prst="rect">
             <a:avLst/>
@@ -961,7 +1215,7 @@
       </p:sp>
       <p:sp>
         <p:nvSpPr>
-          <p:cNvPr id="54" name="PlaceHolder 2"/>
+          <p:cNvPr id="58" name="PlaceHolder 2"/>
           <p:cNvSpPr>
             <a:spLocks noGrp="1"/>
           </p:cNvSpPr>
@@ -971,8 +1225,8 @@
         </p:nvSpPr>
         <p:spPr>
           <a:xfrm>
-            <a:off x="1792440" y="612720"/>
-            <a:ext cx="5486040" cy="4114440"/>
+            <a:off x="1481400" y="955080"/>
+            <a:ext cx="4535640" cy="6414840"/>
           </a:xfrm>
           <a:prstGeom prst="rect">
             <a:avLst/>
@@ -989,7 +1243,7 @@
           <a:p>
             <a:pPr marL="432000" indent="-324000">
               <a:spcBef>
-                <a:spcPts val="1417"/>
+                <a:spcPts val="2203"/>
               </a:spcBef>
               <a:buClr>
                 <a:srgbClr val="000000"/>
@@ -1021,7 +1275,7 @@
           <a:p>
             <a:pPr marL="864000" lvl="1" indent="-324000">
               <a:spcBef>
-                <a:spcPts val="1134"/>
+                <a:spcPts val="1763"/>
               </a:spcBef>
               <a:buClr>
                 <a:srgbClr val="000000"/>
@@ -1053,7 +1307,7 @@
           <a:p>
             <a:pPr marL="1296000" lvl="2" indent="-288000">
               <a:spcBef>
-                <a:spcPts val="850"/>
+                <a:spcPts val="1321"/>
               </a:spcBef>
               <a:buClr>
                 <a:srgbClr val="000000"/>
@@ -1085,7 +1339,7 @@
           <a:p>
             <a:pPr marL="1728000" lvl="3" indent="-216000">
               <a:spcBef>
-                <a:spcPts val="567"/>
+                <a:spcPts val="882"/>
               </a:spcBef>
               <a:buClr>
                 <a:srgbClr val="000000"/>
@@ -1117,7 +1371,7 @@
           <a:p>
             <a:pPr marL="2160000" lvl="4" indent="-216000">
               <a:spcBef>
-                <a:spcPts val="283"/>
+                <a:spcPts val="439"/>
               </a:spcBef>
               <a:buClr>
                 <a:srgbClr val="000000"/>
@@ -1149,7 +1403,7 @@
           <a:p>
             <a:pPr marL="2592000" lvl="5" indent="-216000">
               <a:spcBef>
-                <a:spcPts val="283"/>
+                <a:spcPts val="439"/>
               </a:spcBef>
               <a:buClr>
                 <a:srgbClr val="000000"/>
@@ -1181,7 +1435,7 @@
           <a:p>
             <a:pPr marL="3024000" lvl="6" indent="-216000">
               <a:spcBef>
-                <a:spcPts val="283"/>
+                <a:spcPts val="439"/>
               </a:spcBef>
               <a:buClr>
                 <a:srgbClr val="000000"/>
@@ -1214,7 +1468,7 @@
       </p:sp>
       <p:sp>
         <p:nvSpPr>
-          <p:cNvPr id="55" name="PlaceHolder 3"/>
+          <p:cNvPr id="59" name="PlaceHolder 3"/>
           <p:cNvSpPr>
             <a:spLocks noGrp="1"/>
           </p:cNvSpPr>
@@ -1224,8 +1478,8 @@
         </p:nvSpPr>
         <p:spPr>
           <a:xfrm>
-            <a:off x="1792440" y="5367240"/>
-            <a:ext cx="5486040" cy="804600"/>
+            <a:off x="1481400" y="8367480"/>
+            <a:ext cx="4535640" cy="1254600"/>
           </a:xfrm>
           <a:prstGeom prst="rect">
             <a:avLst/>
@@ -1276,7 +1530,7 @@
       </p:sp>
       <p:sp>
         <p:nvSpPr>
-          <p:cNvPr id="56" name="PlaceHolder 4"/>
+          <p:cNvPr id="60" name="PlaceHolder 4"/>
           <p:cNvSpPr>
             <a:spLocks noGrp="1"/>
           </p:cNvSpPr>
@@ -1286,8 +1540,8 @@
         </p:nvSpPr>
         <p:spPr>
           <a:xfrm>
-            <a:off x="457200" y="6356520"/>
-            <a:ext cx="2133360" cy="364680"/>
+            <a:off x="378000" y="9909720"/>
+            <a:ext cx="1763640" cy="568800"/>
           </a:xfrm>
           <a:prstGeom prst="rect">
             <a:avLst/>
@@ -1352,7 +1606,7 @@
       </p:sp>
       <p:sp>
         <p:nvSpPr>
-          <p:cNvPr id="57" name="PlaceHolder 5"/>
+          <p:cNvPr id="61" name="PlaceHolder 5"/>
           <p:cNvSpPr>
             <a:spLocks noGrp="1"/>
           </p:cNvSpPr>
@@ -1362,8 +1616,8 @@
         </p:nvSpPr>
         <p:spPr>
           <a:xfrm>
-            <a:off x="3124080" y="6356520"/>
-            <a:ext cx="2895120" cy="364680"/>
+            <a:off x="2582640" y="9909720"/>
+            <a:ext cx="2393640" cy="568800"/>
           </a:xfrm>
           <a:prstGeom prst="rect">
             <a:avLst/>
@@ -1418,7 +1672,7 @@
       </p:sp>
       <p:sp>
         <p:nvSpPr>
-          <p:cNvPr id="58" name="PlaceHolder 6"/>
+          <p:cNvPr id="62" name="PlaceHolder 6"/>
           <p:cNvSpPr>
             <a:spLocks noGrp="1"/>
           </p:cNvSpPr>
@@ -1428,8 +1682,8 @@
         </p:nvSpPr>
         <p:spPr>
           <a:xfrm>
-            <a:off x="6553080" y="6356520"/>
-            <a:ext cx="2133360" cy="364680"/>
+            <a:off x="5417640" y="9909720"/>
+            <a:ext cx="1763640" cy="568800"/>
           </a:xfrm>
           <a:prstGeom prst="rect">
             <a:avLst/>
@@ -1468,7 +1722,7 @@
               </a:lnSpc>
               <a:buNone/>
             </a:pPr>
-            <a:fld id="{9E6F585C-1FA6-459A-A340-CBDBF336AF21}" type="slidenum">
+            <a:fld id="{6D8AF5B7-2033-4FB8-87FC-827F472D76E8}" type="slidenum">
               <a:rPr lang="en-US" sz="1200" b="0" u="none" strike="noStrike">
                 <a:solidFill>
                   <a:schemeClr val="dk1">
@@ -1523,7 +1777,7 @@
       </p:grpSpPr>
       <p:sp>
         <p:nvSpPr>
-          <p:cNvPr id="6" name="PlaceHolder 1"/>
+          <p:cNvPr id="7" name="PlaceHolder 1"/>
           <p:cNvSpPr>
             <a:spLocks noGrp="1"/>
           </p:cNvSpPr>
@@ -1533,8 +1787,8 @@
         </p:nvSpPr>
         <p:spPr>
           <a:xfrm>
-            <a:off x="457200" y="274680"/>
-            <a:ext cx="8229240" cy="1142640"/>
+            <a:off x="378000" y="428040"/>
+            <a:ext cx="6803640" cy="1781640"/>
           </a:xfrm>
           <a:prstGeom prst="rect">
             <a:avLst/>
@@ -1579,7 +1833,7 @@
       </p:sp>
       <p:sp>
         <p:nvSpPr>
-          <p:cNvPr id="7" name="PlaceHolder 2"/>
+          <p:cNvPr id="8" name="PlaceHolder 2"/>
           <p:cNvSpPr>
             <a:spLocks noGrp="1"/>
           </p:cNvSpPr>
@@ -1589,8 +1843,8 @@
         </p:nvSpPr>
         <p:spPr>
           <a:xfrm>
-            <a:off x="457200" y="1600200"/>
-            <a:ext cx="8229240" cy="4525560"/>
+            <a:off x="378000" y="2494440"/>
+            <a:ext cx="6803640" cy="7055640"/>
           </a:xfrm>
           <a:prstGeom prst="rect">
             <a:avLst/>
@@ -1778,7 +2032,7 @@
       </p:sp>
       <p:sp>
         <p:nvSpPr>
-          <p:cNvPr id="8" name="PlaceHolder 3"/>
+          <p:cNvPr id="9" name="PlaceHolder 3"/>
           <p:cNvSpPr>
             <a:spLocks noGrp="1"/>
           </p:cNvSpPr>
@@ -1788,8 +2042,8 @@
         </p:nvSpPr>
         <p:spPr>
           <a:xfrm>
-            <a:off x="457200" y="6356520"/>
-            <a:ext cx="2133360" cy="364680"/>
+            <a:off x="378000" y="9909720"/>
+            <a:ext cx="1763640" cy="568800"/>
           </a:xfrm>
           <a:prstGeom prst="rect">
             <a:avLst/>
@@ -1854,7 +2108,7 @@
       </p:sp>
       <p:sp>
         <p:nvSpPr>
-          <p:cNvPr id="9" name="PlaceHolder 4"/>
+          <p:cNvPr id="10" name="PlaceHolder 4"/>
           <p:cNvSpPr>
             <a:spLocks noGrp="1"/>
           </p:cNvSpPr>
@@ -1864,8 +2118,8 @@
         </p:nvSpPr>
         <p:spPr>
           <a:xfrm>
-            <a:off x="3124080" y="6356520"/>
-            <a:ext cx="2895120" cy="364680"/>
+            <a:off x="2582640" y="9909720"/>
+            <a:ext cx="2393640" cy="568800"/>
           </a:xfrm>
           <a:prstGeom prst="rect">
             <a:avLst/>
@@ -1920,7 +2174,7 @@
       </p:sp>
       <p:sp>
         <p:nvSpPr>
-          <p:cNvPr id="10" name="PlaceHolder 5"/>
+          <p:cNvPr id="11" name="PlaceHolder 5"/>
           <p:cNvSpPr>
             <a:spLocks noGrp="1"/>
           </p:cNvSpPr>
@@ -1930,8 +2184,8 @@
         </p:nvSpPr>
         <p:spPr>
           <a:xfrm>
-            <a:off x="6553080" y="6356520"/>
-            <a:ext cx="2133360" cy="364680"/>
+            <a:off x="5417640" y="9909720"/>
+            <a:ext cx="1763640" cy="568800"/>
           </a:xfrm>
           <a:prstGeom prst="rect">
             <a:avLst/>
@@ -1970,7 +2224,7 @@
               </a:lnSpc>
               <a:buNone/>
             </a:pPr>
-            <a:fld id="{58907A54-D9A9-4319-8400-B86E18668DFB}" type="slidenum">
+            <a:fld id="{818C3ACE-212C-44EA-B801-1B386F9FB7B7}" type="slidenum">
               <a:rPr lang="en-US" sz="1200" b="0" u="none" strike="noStrike">
                 <a:solidFill>
                   <a:schemeClr val="dk1">
@@ -2025,7 +2279,7 @@
       </p:grpSpPr>
       <p:sp>
         <p:nvSpPr>
-          <p:cNvPr id="11" name="PlaceHolder 1"/>
+          <p:cNvPr id="12" name="PlaceHolder 1"/>
           <p:cNvSpPr>
             <a:spLocks noGrp="1"/>
           </p:cNvSpPr>
@@ -2035,8 +2289,8 @@
         </p:nvSpPr>
         <p:spPr>
           <a:xfrm>
-            <a:off x="6629400" y="274680"/>
-            <a:ext cx="2057040" cy="5851080"/>
+            <a:off x="5480640" y="428040"/>
+            <a:ext cx="1700640" cy="9122400"/>
           </a:xfrm>
           <a:prstGeom prst="rect">
             <a:avLst/>
@@ -2081,7 +2335,7 @@
       </p:sp>
       <p:sp>
         <p:nvSpPr>
-          <p:cNvPr id="12" name="PlaceHolder 2"/>
+          <p:cNvPr id="13" name="PlaceHolder 2"/>
           <p:cNvSpPr>
             <a:spLocks noGrp="1"/>
           </p:cNvSpPr>
@@ -2091,8 +2345,8 @@
         </p:nvSpPr>
         <p:spPr>
           <a:xfrm>
-            <a:off x="457200" y="274680"/>
-            <a:ext cx="6019560" cy="5851080"/>
+            <a:off x="378000" y="427680"/>
+            <a:ext cx="4977000" cy="9122040"/>
           </a:xfrm>
           <a:prstGeom prst="rect">
             <a:avLst/>
@@ -2280,7 +2534,7 @@
       </p:sp>
       <p:sp>
         <p:nvSpPr>
-          <p:cNvPr id="13" name="PlaceHolder 3"/>
+          <p:cNvPr id="14" name="PlaceHolder 3"/>
           <p:cNvSpPr>
             <a:spLocks noGrp="1"/>
           </p:cNvSpPr>
@@ -2290,8 +2544,8 @@
         </p:nvSpPr>
         <p:spPr>
           <a:xfrm>
-            <a:off x="457200" y="6356520"/>
-            <a:ext cx="2133360" cy="364680"/>
+            <a:off x="378000" y="9909720"/>
+            <a:ext cx="1763640" cy="568800"/>
           </a:xfrm>
           <a:prstGeom prst="rect">
             <a:avLst/>
@@ -2356,7 +2610,7 @@
       </p:sp>
       <p:sp>
         <p:nvSpPr>
-          <p:cNvPr id="14" name="PlaceHolder 4"/>
+          <p:cNvPr id="15" name="PlaceHolder 4"/>
           <p:cNvSpPr>
             <a:spLocks noGrp="1"/>
           </p:cNvSpPr>
@@ -2366,8 +2620,8 @@
         </p:nvSpPr>
         <p:spPr>
           <a:xfrm>
-            <a:off x="3124080" y="6356520"/>
-            <a:ext cx="2895120" cy="364680"/>
+            <a:off x="2582640" y="9909720"/>
+            <a:ext cx="2393640" cy="568800"/>
           </a:xfrm>
           <a:prstGeom prst="rect">
             <a:avLst/>
@@ -2422,7 +2676,7 @@
       </p:sp>
       <p:sp>
         <p:nvSpPr>
-          <p:cNvPr id="15" name="PlaceHolder 5"/>
+          <p:cNvPr id="16" name="PlaceHolder 5"/>
           <p:cNvSpPr>
             <a:spLocks noGrp="1"/>
           </p:cNvSpPr>
@@ -2432,8 +2686,8 @@
         </p:nvSpPr>
         <p:spPr>
           <a:xfrm>
-            <a:off x="6553080" y="6356520"/>
-            <a:ext cx="2133360" cy="364680"/>
+            <a:off x="5417640" y="9909720"/>
+            <a:ext cx="1763640" cy="568800"/>
           </a:xfrm>
           <a:prstGeom prst="rect">
             <a:avLst/>
@@ -2472,7 +2726,7 @@
               </a:lnSpc>
               <a:buNone/>
             </a:pPr>
-            <a:fld id="{4CD8C482-4667-4A87-B700-F5C4803258C5}" type="slidenum">
+            <a:fld id="{EAA22206-AAAA-42A9-A7CA-64A87B993BE8}" type="slidenum">
               <a:rPr lang="en-US" sz="1200" b="0" u="none" strike="noStrike">
                 <a:solidFill>
                   <a:schemeClr val="dk1">
@@ -2527,7 +2781,7 @@
       </p:grpSpPr>
       <p:sp>
         <p:nvSpPr>
-          <p:cNvPr id="16" name="PlaceHolder 1"/>
+          <p:cNvPr id="17" name="PlaceHolder 1"/>
           <p:cNvSpPr>
             <a:spLocks noGrp="1"/>
           </p:cNvSpPr>
@@ -2537,8 +2791,8 @@
         </p:nvSpPr>
         <p:spPr>
           <a:xfrm>
-            <a:off x="457200" y="274680"/>
-            <a:ext cx="8229240" cy="1142640"/>
+            <a:off x="378000" y="428040"/>
+            <a:ext cx="6803640" cy="1781640"/>
           </a:xfrm>
           <a:prstGeom prst="rect">
             <a:avLst/>
@@ -2583,7 +2837,7 @@
       </p:sp>
       <p:sp>
         <p:nvSpPr>
-          <p:cNvPr id="17" name="PlaceHolder 2"/>
+          <p:cNvPr id="18" name="PlaceHolder 2"/>
           <p:cNvSpPr>
             <a:spLocks noGrp="1"/>
           </p:cNvSpPr>
@@ -2593,8 +2847,8 @@
         </p:nvSpPr>
         <p:spPr>
           <a:xfrm>
-            <a:off x="457200" y="1600200"/>
-            <a:ext cx="8229240" cy="4525560"/>
+            <a:off x="378000" y="2494800"/>
+            <a:ext cx="6803640" cy="7055640"/>
           </a:xfrm>
           <a:prstGeom prst="rect">
             <a:avLst/>
@@ -2782,7 +3036,7 @@
       </p:sp>
       <p:sp>
         <p:nvSpPr>
-          <p:cNvPr id="18" name="PlaceHolder 3"/>
+          <p:cNvPr id="19" name="PlaceHolder 3"/>
           <p:cNvSpPr>
             <a:spLocks noGrp="1"/>
           </p:cNvSpPr>
@@ -2792,8 +3046,8 @@
         </p:nvSpPr>
         <p:spPr>
           <a:xfrm>
-            <a:off x="457200" y="6356520"/>
-            <a:ext cx="2133360" cy="364680"/>
+            <a:off x="378000" y="9909720"/>
+            <a:ext cx="1763640" cy="568800"/>
           </a:xfrm>
           <a:prstGeom prst="rect">
             <a:avLst/>
@@ -2858,7 +3112,7 @@
       </p:sp>
       <p:sp>
         <p:nvSpPr>
-          <p:cNvPr id="19" name="PlaceHolder 4"/>
+          <p:cNvPr id="20" name="PlaceHolder 4"/>
           <p:cNvSpPr>
             <a:spLocks noGrp="1"/>
           </p:cNvSpPr>
@@ -2868,8 +3122,8 @@
         </p:nvSpPr>
         <p:spPr>
           <a:xfrm>
-            <a:off x="3124080" y="6356520"/>
-            <a:ext cx="2895120" cy="364680"/>
+            <a:off x="2582640" y="9909720"/>
+            <a:ext cx="2393640" cy="568800"/>
           </a:xfrm>
           <a:prstGeom prst="rect">
             <a:avLst/>
@@ -2924,7 +3178,7 @@
       </p:sp>
       <p:sp>
         <p:nvSpPr>
-          <p:cNvPr id="20" name="PlaceHolder 5"/>
+          <p:cNvPr id="21" name="PlaceHolder 5"/>
           <p:cNvSpPr>
             <a:spLocks noGrp="1"/>
           </p:cNvSpPr>
@@ -2934,8 +3188,8 @@
         </p:nvSpPr>
         <p:spPr>
           <a:xfrm>
-            <a:off x="6553080" y="6356520"/>
-            <a:ext cx="2133360" cy="364680"/>
+            <a:off x="5417640" y="9909720"/>
+            <a:ext cx="1763640" cy="568800"/>
           </a:xfrm>
           <a:prstGeom prst="rect">
             <a:avLst/>
@@ -2974,7 +3228,7 @@
               </a:lnSpc>
               <a:buNone/>
             </a:pPr>
-            <a:fld id="{8705669C-1CC8-456D-9FE3-CAA6A801C235}" type="slidenum">
+            <a:fld id="{BAD2187D-1F6F-4F61-A8C3-077F1106B00A}" type="slidenum">
               <a:rPr lang="en-US" sz="1200" b="0" u="none" strike="noStrike">
                 <a:solidFill>
                   <a:schemeClr val="dk1">
@@ -3029,7 +3283,7 @@
       </p:grpSpPr>
       <p:sp>
         <p:nvSpPr>
-          <p:cNvPr id="21" name="PlaceHolder 1"/>
+          <p:cNvPr id="22" name="PlaceHolder 1"/>
           <p:cNvSpPr>
             <a:spLocks noGrp="1"/>
           </p:cNvSpPr>
@@ -3039,8 +3293,8 @@
         </p:nvSpPr>
         <p:spPr>
           <a:xfrm>
-            <a:off x="722160" y="4406760"/>
-            <a:ext cx="7772040" cy="1361880"/>
+            <a:off x="596880" y="6870240"/>
+            <a:ext cx="6425640" cy="2123280"/>
           </a:xfrm>
           <a:prstGeom prst="rect">
             <a:avLst/>
@@ -3085,7 +3339,7 @@
       </p:sp>
       <p:sp>
         <p:nvSpPr>
-          <p:cNvPr id="22" name="PlaceHolder 2"/>
+          <p:cNvPr id="23" name="PlaceHolder 2"/>
           <p:cNvSpPr>
             <a:spLocks noGrp="1"/>
           </p:cNvSpPr>
@@ -3095,8 +3349,8 @@
         </p:nvSpPr>
         <p:spPr>
           <a:xfrm>
-            <a:off x="722160" y="2906640"/>
-            <a:ext cx="7772040" cy="1499760"/>
+            <a:off x="596880" y="4531320"/>
+            <a:ext cx="6425640" cy="2337840"/>
           </a:xfrm>
           <a:prstGeom prst="rect">
             <a:avLst/>
@@ -3149,7 +3403,7 @@
       </p:sp>
       <p:sp>
         <p:nvSpPr>
-          <p:cNvPr id="23" name="PlaceHolder 3"/>
+          <p:cNvPr id="24" name="PlaceHolder 3"/>
           <p:cNvSpPr>
             <a:spLocks noGrp="1"/>
           </p:cNvSpPr>
@@ -3159,8 +3413,8 @@
         </p:nvSpPr>
         <p:spPr>
           <a:xfrm>
-            <a:off x="457200" y="6356520"/>
-            <a:ext cx="2133360" cy="364680"/>
+            <a:off x="378000" y="9909720"/>
+            <a:ext cx="1763640" cy="568800"/>
           </a:xfrm>
           <a:prstGeom prst="rect">
             <a:avLst/>
@@ -3225,7 +3479,7 @@
       </p:sp>
       <p:sp>
         <p:nvSpPr>
-          <p:cNvPr id="24" name="PlaceHolder 4"/>
+          <p:cNvPr id="25" name="PlaceHolder 4"/>
           <p:cNvSpPr>
             <a:spLocks noGrp="1"/>
           </p:cNvSpPr>
@@ -3235,8 +3489,8 @@
         </p:nvSpPr>
         <p:spPr>
           <a:xfrm>
-            <a:off x="3124080" y="6356520"/>
-            <a:ext cx="2895120" cy="364680"/>
+            <a:off x="2582640" y="9909720"/>
+            <a:ext cx="2393640" cy="568800"/>
           </a:xfrm>
           <a:prstGeom prst="rect">
             <a:avLst/>
@@ -3291,7 +3545,7 @@
       </p:sp>
       <p:sp>
         <p:nvSpPr>
-          <p:cNvPr id="25" name="PlaceHolder 5"/>
+          <p:cNvPr id="26" name="PlaceHolder 5"/>
           <p:cNvSpPr>
             <a:spLocks noGrp="1"/>
           </p:cNvSpPr>
@@ -3301,8 +3555,8 @@
         </p:nvSpPr>
         <p:spPr>
           <a:xfrm>
-            <a:off x="6553080" y="6356520"/>
-            <a:ext cx="2133360" cy="364680"/>
+            <a:off x="5417640" y="9909720"/>
+            <a:ext cx="1763640" cy="568800"/>
           </a:xfrm>
           <a:prstGeom prst="rect">
             <a:avLst/>
@@ -3341,7 +3595,7 @@
               </a:lnSpc>
               <a:buNone/>
             </a:pPr>
-            <a:fld id="{7BD1038D-AC6C-44CD-82BD-02C779EE8CDD}" type="slidenum">
+            <a:fld id="{1389085A-8E70-4EAD-9BC6-1C4E810397C5}" type="slidenum">
               <a:rPr lang="en-US" sz="1200" b="0" u="none" strike="noStrike">
                 <a:solidFill>
                   <a:schemeClr val="dk1">
@@ -3396,7 +3650,7 @@
       </p:grpSpPr>
       <p:sp>
         <p:nvSpPr>
-          <p:cNvPr id="26" name="PlaceHolder 1"/>
+          <p:cNvPr id="27" name="PlaceHolder 1"/>
           <p:cNvSpPr>
             <a:spLocks noGrp="1"/>
           </p:cNvSpPr>
@@ -3406,8 +3660,8 @@
         </p:nvSpPr>
         <p:spPr>
           <a:xfrm>
-            <a:off x="457200" y="274680"/>
-            <a:ext cx="8229240" cy="1142640"/>
+            <a:off x="378000" y="428040"/>
+            <a:ext cx="6803640" cy="1781640"/>
           </a:xfrm>
           <a:prstGeom prst="rect">
             <a:avLst/>
@@ -3452,7 +3706,7 @@
       </p:sp>
       <p:sp>
         <p:nvSpPr>
-          <p:cNvPr id="27" name="PlaceHolder 2"/>
+          <p:cNvPr id="28" name="PlaceHolder 2"/>
           <p:cNvSpPr>
             <a:spLocks noGrp="1"/>
           </p:cNvSpPr>
@@ -3462,8 +3716,8 @@
         </p:nvSpPr>
         <p:spPr>
           <a:xfrm>
-            <a:off x="457200" y="1600200"/>
-            <a:ext cx="4038120" cy="4525560"/>
+            <a:off x="378000" y="2494800"/>
+            <a:ext cx="3338640" cy="7055640"/>
           </a:xfrm>
           <a:prstGeom prst="rect">
             <a:avLst/>
@@ -3651,7 +3905,7 @@
       </p:sp>
       <p:sp>
         <p:nvSpPr>
-          <p:cNvPr id="28" name="PlaceHolder 3"/>
+          <p:cNvPr id="29" name="PlaceHolder 3"/>
           <p:cNvSpPr>
             <a:spLocks noGrp="1"/>
           </p:cNvSpPr>
@@ -3661,8 +3915,8 @@
         </p:nvSpPr>
         <p:spPr>
           <a:xfrm>
-            <a:off x="4648320" y="1600200"/>
-            <a:ext cx="4038120" cy="4525560"/>
+            <a:off x="3842640" y="2494800"/>
+            <a:ext cx="3338640" cy="7055640"/>
           </a:xfrm>
           <a:prstGeom prst="rect">
             <a:avLst/>
@@ -3850,7 +4104,7 @@
       </p:sp>
       <p:sp>
         <p:nvSpPr>
-          <p:cNvPr id="29" name="PlaceHolder 4"/>
+          <p:cNvPr id="30" name="PlaceHolder 4"/>
           <p:cNvSpPr>
             <a:spLocks noGrp="1"/>
           </p:cNvSpPr>
@@ -3860,8 +4114,8 @@
         </p:nvSpPr>
         <p:spPr>
           <a:xfrm>
-            <a:off x="457200" y="6356520"/>
-            <a:ext cx="2133360" cy="364680"/>
+            <a:off x="378000" y="9909720"/>
+            <a:ext cx="1763640" cy="568800"/>
           </a:xfrm>
           <a:prstGeom prst="rect">
             <a:avLst/>
@@ -3926,7 +4180,7 @@
       </p:sp>
       <p:sp>
         <p:nvSpPr>
-          <p:cNvPr id="30" name="PlaceHolder 5"/>
+          <p:cNvPr id="31" name="PlaceHolder 5"/>
           <p:cNvSpPr>
             <a:spLocks noGrp="1"/>
           </p:cNvSpPr>
@@ -3936,8 +4190,8 @@
         </p:nvSpPr>
         <p:spPr>
           <a:xfrm>
-            <a:off x="3124080" y="6356520"/>
-            <a:ext cx="2895120" cy="364680"/>
+            <a:off x="2582640" y="9909720"/>
+            <a:ext cx="2393640" cy="568800"/>
           </a:xfrm>
           <a:prstGeom prst="rect">
             <a:avLst/>
@@ -3992,7 +4246,7 @@
       </p:sp>
       <p:sp>
         <p:nvSpPr>
-          <p:cNvPr id="31" name="PlaceHolder 6"/>
+          <p:cNvPr id="32" name="PlaceHolder 6"/>
           <p:cNvSpPr>
             <a:spLocks noGrp="1"/>
           </p:cNvSpPr>
@@ -4002,8 +4256,8 @@
         </p:nvSpPr>
         <p:spPr>
           <a:xfrm>
-            <a:off x="6553080" y="6356520"/>
-            <a:ext cx="2133360" cy="364680"/>
+            <a:off x="5417640" y="9909720"/>
+            <a:ext cx="1763640" cy="568800"/>
           </a:xfrm>
           <a:prstGeom prst="rect">
             <a:avLst/>
@@ -4042,7 +4296,7 @@
               </a:lnSpc>
               <a:buNone/>
             </a:pPr>
-            <a:fld id="{03983836-3A42-4AEA-BBAA-C08867680E7A}" type="slidenum">
+            <a:fld id="{E7B4801A-FFB0-4612-AB6F-2942D5A64D1C}" type="slidenum">
               <a:rPr lang="en-US" sz="1200" b="0" u="none" strike="noStrike">
                 <a:solidFill>
                   <a:schemeClr val="dk1">
@@ -4097,7 +4351,7 @@
       </p:grpSpPr>
       <p:sp>
         <p:nvSpPr>
-          <p:cNvPr id="32" name="PlaceHolder 1"/>
+          <p:cNvPr id="33" name="PlaceHolder 1"/>
           <p:cNvSpPr>
             <a:spLocks noGrp="1"/>
           </p:cNvSpPr>
@@ -4107,8 +4361,8 @@
         </p:nvSpPr>
         <p:spPr>
           <a:xfrm>
-            <a:off x="457200" y="274680"/>
-            <a:ext cx="8229240" cy="1142640"/>
+            <a:off x="378000" y="428040"/>
+            <a:ext cx="6803640" cy="1781640"/>
           </a:xfrm>
           <a:prstGeom prst="rect">
             <a:avLst/>
@@ -4153,7 +4407,7 @@
       </p:sp>
       <p:sp>
         <p:nvSpPr>
-          <p:cNvPr id="33" name="PlaceHolder 2"/>
+          <p:cNvPr id="34" name="PlaceHolder 2"/>
           <p:cNvSpPr>
             <a:spLocks noGrp="1"/>
           </p:cNvSpPr>
@@ -4163,8 +4417,8 @@
         </p:nvSpPr>
         <p:spPr>
           <a:xfrm>
-            <a:off x="457200" y="1535040"/>
-            <a:ext cx="4039920" cy="639360"/>
+            <a:off x="378000" y="2392920"/>
+            <a:ext cx="3340080" cy="996840"/>
           </a:xfrm>
           <a:prstGeom prst="rect">
             <a:avLst/>
@@ -4215,7 +4469,7 @@
       </p:sp>
       <p:sp>
         <p:nvSpPr>
-          <p:cNvPr id="34" name="PlaceHolder 3"/>
+          <p:cNvPr id="35" name="PlaceHolder 3"/>
           <p:cNvSpPr>
             <a:spLocks noGrp="1"/>
           </p:cNvSpPr>
@@ -4225,8 +4479,8 @@
         </p:nvSpPr>
         <p:spPr>
           <a:xfrm>
-            <a:off x="457200" y="2174760"/>
-            <a:ext cx="4039920" cy="3951000"/>
+            <a:off x="378000" y="3390120"/>
+            <a:ext cx="3340080" cy="6159600"/>
           </a:xfrm>
           <a:prstGeom prst="rect">
             <a:avLst/>
@@ -4414,7 +4668,7 @@
       </p:sp>
       <p:sp>
         <p:nvSpPr>
-          <p:cNvPr id="35" name="PlaceHolder 4"/>
+          <p:cNvPr id="36" name="PlaceHolder 4"/>
           <p:cNvSpPr>
             <a:spLocks noGrp="1"/>
           </p:cNvSpPr>
@@ -4424,8 +4678,8 @@
         </p:nvSpPr>
         <p:spPr>
           <a:xfrm>
-            <a:off x="4645080" y="1535040"/>
-            <a:ext cx="4041360" cy="639360"/>
+            <a:off x="3840120" y="2392920"/>
+            <a:ext cx="3341160" cy="996840"/>
           </a:xfrm>
           <a:prstGeom prst="rect">
             <a:avLst/>
@@ -4476,7 +4730,7 @@
       </p:sp>
       <p:sp>
         <p:nvSpPr>
-          <p:cNvPr id="36" name="PlaceHolder 5"/>
+          <p:cNvPr id="37" name="PlaceHolder 5"/>
           <p:cNvSpPr>
             <a:spLocks noGrp="1"/>
           </p:cNvSpPr>
@@ -4486,8 +4740,8 @@
         </p:nvSpPr>
         <p:spPr>
           <a:xfrm>
-            <a:off x="4645080" y="2174760"/>
-            <a:ext cx="4041360" cy="3951000"/>
+            <a:off x="3840120" y="3390120"/>
+            <a:ext cx="3341160" cy="6159600"/>
           </a:xfrm>
           <a:prstGeom prst="rect">
             <a:avLst/>
@@ -4675,7 +4929,7 @@
       </p:sp>
       <p:sp>
         <p:nvSpPr>
-          <p:cNvPr id="37" name="PlaceHolder 6"/>
+          <p:cNvPr id="38" name="PlaceHolder 6"/>
           <p:cNvSpPr>
             <a:spLocks noGrp="1"/>
           </p:cNvSpPr>
@@ -4685,8 +4939,8 @@
         </p:nvSpPr>
         <p:spPr>
           <a:xfrm>
-            <a:off x="457200" y="6356520"/>
-            <a:ext cx="2133360" cy="364680"/>
+            <a:off x="378000" y="9909720"/>
+            <a:ext cx="1763640" cy="568800"/>
           </a:xfrm>
           <a:prstGeom prst="rect">
             <a:avLst/>
@@ -4751,7 +5005,7 @@
       </p:sp>
       <p:sp>
         <p:nvSpPr>
-          <p:cNvPr id="38" name="PlaceHolder 7"/>
+          <p:cNvPr id="39" name="PlaceHolder 7"/>
           <p:cNvSpPr>
             <a:spLocks noGrp="1"/>
           </p:cNvSpPr>
@@ -4761,8 +5015,8 @@
         </p:nvSpPr>
         <p:spPr>
           <a:xfrm>
-            <a:off x="3124080" y="6356520"/>
-            <a:ext cx="2895120" cy="364680"/>
+            <a:off x="2582640" y="9909720"/>
+            <a:ext cx="2393640" cy="568800"/>
           </a:xfrm>
           <a:prstGeom prst="rect">
             <a:avLst/>
@@ -4817,7 +5071,7 @@
       </p:sp>
       <p:sp>
         <p:nvSpPr>
-          <p:cNvPr id="39" name="PlaceHolder 8"/>
+          <p:cNvPr id="40" name="PlaceHolder 8"/>
           <p:cNvSpPr>
             <a:spLocks noGrp="1"/>
           </p:cNvSpPr>
@@ -4827,8 +5081,8 @@
         </p:nvSpPr>
         <p:spPr>
           <a:xfrm>
-            <a:off x="6553080" y="6356520"/>
-            <a:ext cx="2133360" cy="364680"/>
+            <a:off x="5417640" y="9909720"/>
+            <a:ext cx="1763640" cy="568800"/>
           </a:xfrm>
           <a:prstGeom prst="rect">
             <a:avLst/>
@@ -4867,7 +5121,7 @@
               </a:lnSpc>
               <a:buNone/>
             </a:pPr>
-            <a:fld id="{44D60347-4757-4B7F-9868-B89838ACE6F8}" type="slidenum">
+            <a:fld id="{894791AA-657F-47AC-920D-F90FFB86D155}" type="slidenum">
               <a:rPr lang="en-US" sz="1200" b="0" u="none" strike="noStrike">
                 <a:solidFill>
                   <a:schemeClr val="dk1">
@@ -4922,7 +5176,7 @@
       </p:grpSpPr>
       <p:sp>
         <p:nvSpPr>
-          <p:cNvPr id="40" name="PlaceHolder 1"/>
+          <p:cNvPr id="41" name="PlaceHolder 1"/>
           <p:cNvSpPr>
             <a:spLocks noGrp="1"/>
           </p:cNvSpPr>
@@ -4932,8 +5186,8 @@
         </p:nvSpPr>
         <p:spPr>
           <a:xfrm>
-            <a:off x="457200" y="274680"/>
-            <a:ext cx="8229240" cy="1142640"/>
+            <a:off x="378000" y="428040"/>
+            <a:ext cx="6803640" cy="1781640"/>
           </a:xfrm>
           <a:prstGeom prst="rect">
             <a:avLst/>
@@ -4978,7 +5232,7 @@
       </p:sp>
       <p:sp>
         <p:nvSpPr>
-          <p:cNvPr id="41" name="PlaceHolder 2"/>
+          <p:cNvPr id="42" name="PlaceHolder 2"/>
           <p:cNvSpPr>
             <a:spLocks noGrp="1"/>
           </p:cNvSpPr>
@@ -4988,8 +5242,8 @@
         </p:nvSpPr>
         <p:spPr>
           <a:xfrm>
-            <a:off x="457200" y="6356520"/>
-            <a:ext cx="2133360" cy="364680"/>
+            <a:off x="378000" y="9909720"/>
+            <a:ext cx="1763640" cy="568800"/>
           </a:xfrm>
           <a:prstGeom prst="rect">
             <a:avLst/>
@@ -5054,7 +5308,7 @@
       </p:sp>
       <p:sp>
         <p:nvSpPr>
-          <p:cNvPr id="42" name="PlaceHolder 3"/>
+          <p:cNvPr id="43" name="PlaceHolder 3"/>
           <p:cNvSpPr>
             <a:spLocks noGrp="1"/>
           </p:cNvSpPr>
@@ -5064,8 +5318,8 @@
         </p:nvSpPr>
         <p:spPr>
           <a:xfrm>
-            <a:off x="3124080" y="6356520"/>
-            <a:ext cx="2895120" cy="364680"/>
+            <a:off x="2582640" y="9909720"/>
+            <a:ext cx="2393640" cy="568800"/>
           </a:xfrm>
           <a:prstGeom prst="rect">
             <a:avLst/>
@@ -5120,7 +5374,7 @@
       </p:sp>
       <p:sp>
         <p:nvSpPr>
-          <p:cNvPr id="43" name="PlaceHolder 4"/>
+          <p:cNvPr id="44" name="PlaceHolder 4"/>
           <p:cNvSpPr>
             <a:spLocks noGrp="1"/>
           </p:cNvSpPr>
@@ -5130,8 +5384,8 @@
         </p:nvSpPr>
         <p:spPr>
           <a:xfrm>
-            <a:off x="6553080" y="6356520"/>
-            <a:ext cx="2133360" cy="364680"/>
+            <a:off x="5417640" y="9909720"/>
+            <a:ext cx="1763640" cy="568800"/>
           </a:xfrm>
           <a:prstGeom prst="rect">
             <a:avLst/>
@@ -5170,7 +5424,7 @@
               </a:lnSpc>
               <a:buNone/>
             </a:pPr>
-            <a:fld id="{04E7666A-F0BE-46A1-99F8-40BBA3575FDD}" type="slidenum">
+            <a:fld id="{58BC538B-4E7B-4963-A790-E38C85F15A4D}" type="slidenum">
               <a:rPr lang="en-US" sz="1200" b="0" u="none" strike="noStrike">
                 <a:solidFill>
                   <a:schemeClr val="dk1">
@@ -5190,6 +5444,259 @@
               <a:effectLst/>
               <a:uFillTx/>
               <a:latin typeface="Times New Roman"/>
+            </a:endParaRPr>
+          </a:p>
+        </p:txBody>
+      </p:sp>
+      <p:sp>
+        <p:nvSpPr>
+          <p:cNvPr id="45" name="PlaceHolder 5"/>
+          <p:cNvSpPr>
+            <a:spLocks noGrp="1"/>
+          </p:cNvSpPr>
+          <p:nvPr>
+            <p:ph type="body"/>
+          </p:nvPr>
+        </p:nvSpPr>
+        <p:spPr>
+          <a:xfrm>
+            <a:off x="378000" y="2501640"/>
+            <a:ext cx="6803640" cy="6201000"/>
+          </a:xfrm>
+          <a:prstGeom prst="rect">
+            <a:avLst/>
+          </a:prstGeom>
+          <a:noFill/>
+          <a:ln w="0">
+            <a:noFill/>
+          </a:ln>
+        </p:spPr>
+        <p:txBody>
+          <a:bodyPr lIns="0" rIns="0" tIns="0" bIns="0" anchor="t">
+            <a:normAutofit/>
+          </a:bodyPr>
+          <a:p>
+            <a:pPr marL="432000" indent="-324000">
+              <a:spcBef>
+                <a:spcPts val="2001"/>
+              </a:spcBef>
+              <a:buClr>
+                <a:srgbClr val="000000"/>
+              </a:buClr>
+              <a:buSzPct val="45000"/>
+              <a:buFont typeface="Wingdings" charset="2"/>
+              <a:buChar char=""/>
+            </a:pPr>
+            <a:r>
+              <a:rPr lang="en-US" sz="4520" b="0" u="none" strike="noStrike">
+                <a:solidFill>
+                  <a:schemeClr val="dk1"/>
+                </a:solidFill>
+                <a:effectLst/>
+                <a:uFillTx/>
+                <a:latin typeface="Calibri"/>
+              </a:rPr>
+              <a:t>Format des Gliederungstextes durch Klicken bearbeiten</a:t>
+            </a:r>
+            <a:endParaRPr lang="en-US" sz="4520" b="0" u="none" strike="noStrike">
+              <a:solidFill>
+                <a:schemeClr val="dk1"/>
+              </a:solidFill>
+              <a:effectLst/>
+              <a:uFillTx/>
+              <a:latin typeface="Calibri"/>
+            </a:endParaRPr>
+          </a:p>
+          <a:p>
+            <a:pPr marL="864000" lvl="1" indent="-324000">
+              <a:spcBef>
+                <a:spcPts val="1602"/>
+              </a:spcBef>
+              <a:buClr>
+                <a:srgbClr val="000000"/>
+              </a:buClr>
+              <a:buSzPct val="75000"/>
+              <a:buFont typeface="Symbol" charset="2"/>
+              <a:buChar char=""/>
+            </a:pPr>
+            <a:r>
+              <a:rPr lang="en-US" sz="3390" b="0" u="none" strike="noStrike">
+                <a:solidFill>
+                  <a:schemeClr val="dk1"/>
+                </a:solidFill>
+                <a:effectLst/>
+                <a:uFillTx/>
+                <a:latin typeface="Calibri"/>
+              </a:rPr>
+              <a:t>Zweite Gliederungsebene</a:t>
+            </a:r>
+            <a:endParaRPr lang="en-US" sz="3390" b="0" u="none" strike="noStrike">
+              <a:solidFill>
+                <a:schemeClr val="dk1"/>
+              </a:solidFill>
+              <a:effectLst/>
+              <a:uFillTx/>
+              <a:latin typeface="Calibri"/>
+            </a:endParaRPr>
+          </a:p>
+          <a:p>
+            <a:pPr marL="1296000" lvl="2" indent="-288000">
+              <a:spcBef>
+                <a:spcPts val="1202"/>
+              </a:spcBef>
+              <a:buClr>
+                <a:srgbClr val="000000"/>
+              </a:buClr>
+              <a:buSzPct val="45000"/>
+              <a:buFont typeface="Wingdings" charset="2"/>
+              <a:buChar char=""/>
+            </a:pPr>
+            <a:r>
+              <a:rPr lang="en-US" sz="2830" b="0" u="none" strike="noStrike">
+                <a:solidFill>
+                  <a:schemeClr val="dk1"/>
+                </a:solidFill>
+                <a:effectLst/>
+                <a:uFillTx/>
+                <a:latin typeface="Calibri"/>
+              </a:rPr>
+              <a:t>Dritte Gliederungsebene</a:t>
+            </a:r>
+            <a:endParaRPr lang="en-US" sz="2830" b="0" u="none" strike="noStrike">
+              <a:solidFill>
+                <a:schemeClr val="dk1"/>
+              </a:solidFill>
+              <a:effectLst/>
+              <a:uFillTx/>
+              <a:latin typeface="Calibri"/>
+            </a:endParaRPr>
+          </a:p>
+          <a:p>
+            <a:pPr marL="1728000" lvl="3" indent="-216000">
+              <a:spcBef>
+                <a:spcPts val="799"/>
+              </a:spcBef>
+              <a:buClr>
+                <a:srgbClr val="000000"/>
+              </a:buClr>
+              <a:buSzPct val="75000"/>
+              <a:buFont typeface="Symbol" charset="2"/>
+              <a:buChar char=""/>
+            </a:pPr>
+            <a:r>
+              <a:rPr lang="en-US" sz="2830" b="0" u="none" strike="noStrike">
+                <a:solidFill>
+                  <a:schemeClr val="dk1"/>
+                </a:solidFill>
+                <a:effectLst/>
+                <a:uFillTx/>
+                <a:latin typeface="Calibri"/>
+              </a:rPr>
+              <a:t>Vierte Gliederungsebene</a:t>
+            </a:r>
+            <a:endParaRPr lang="en-US" sz="2830" b="0" u="none" strike="noStrike">
+              <a:solidFill>
+                <a:schemeClr val="dk1"/>
+              </a:solidFill>
+              <a:effectLst/>
+              <a:uFillTx/>
+              <a:latin typeface="Calibri"/>
+            </a:endParaRPr>
+          </a:p>
+          <a:p>
+            <a:pPr marL="2160000" lvl="4" indent="-216000">
+              <a:spcBef>
+                <a:spcPts val="400"/>
+              </a:spcBef>
+              <a:buClr>
+                <a:srgbClr val="000000"/>
+              </a:buClr>
+              <a:buSzPct val="45000"/>
+              <a:buFont typeface="Wingdings" charset="2"/>
+              <a:buChar char=""/>
+            </a:pPr>
+            <a:r>
+              <a:rPr lang="en-US" sz="2830" b="0" u="none" strike="noStrike">
+                <a:solidFill>
+                  <a:schemeClr val="dk1"/>
+                </a:solidFill>
+                <a:effectLst/>
+                <a:uFillTx/>
+                <a:latin typeface="Calibri"/>
+              </a:rPr>
+              <a:t>Fünfte Gliederungsebene</a:t>
+            </a:r>
+            <a:endParaRPr lang="en-US" sz="2830" b="0" u="none" strike="noStrike">
+              <a:solidFill>
+                <a:schemeClr val="dk1"/>
+              </a:solidFill>
+              <a:effectLst/>
+              <a:uFillTx/>
+              <a:latin typeface="Calibri"/>
+            </a:endParaRPr>
+          </a:p>
+          <a:p>
+            <a:pPr marL="2592000" lvl="5" indent="-216000">
+              <a:spcBef>
+                <a:spcPts val="400"/>
+              </a:spcBef>
+              <a:buClr>
+                <a:srgbClr val="000000"/>
+              </a:buClr>
+              <a:buSzPct val="45000"/>
+              <a:buFont typeface="Wingdings" charset="2"/>
+              <a:buChar char=""/>
+            </a:pPr>
+            <a:r>
+              <a:rPr lang="en-US" sz="2830" b="0" u="none" strike="noStrike">
+                <a:solidFill>
+                  <a:schemeClr val="dk1"/>
+                </a:solidFill>
+                <a:effectLst/>
+                <a:uFillTx/>
+                <a:latin typeface="Calibri"/>
+              </a:rPr>
+              <a:t>Sechste Gliederungsebene</a:t>
+            </a:r>
+            <a:endParaRPr lang="en-US" sz="2830" b="0" u="none" strike="noStrike">
+              <a:solidFill>
+                <a:schemeClr val="dk1"/>
+              </a:solidFill>
+              <a:effectLst/>
+              <a:uFillTx/>
+              <a:latin typeface="Calibri"/>
+            </a:endParaRPr>
+          </a:p>
+          <a:p>
+            <a:pPr marL="3024000" lvl="6" indent="-216000">
+              <a:spcBef>
+                <a:spcPts val="400"/>
+              </a:spcBef>
+              <a:buClr>
+                <a:srgbClr val="000000"/>
+              </a:buClr>
+              <a:buSzPct val="45000"/>
+              <a:buFont typeface="Wingdings" charset="2"/>
+              <a:buChar char=""/>
+            </a:pPr>
+            <a:r>
+              <a:rPr lang="en-US" sz="2830" b="0" u="none" strike="noStrike">
+                <a:solidFill>
+                  <a:schemeClr val="dk1"/>
+                </a:solidFill>
+                <a:effectLst/>
+                <a:uFillTx/>
+                <a:latin typeface="Calibri"/>
+              </a:rPr>
+              <a:t>Siebte Gliederungsebene</a:t>
+            </a:r>
+            <a:endParaRPr lang="en-US" sz="2830" b="0" u="none" strike="noStrike">
+              <a:solidFill>
+                <a:schemeClr val="dk1"/>
+              </a:solidFill>
+              <a:effectLst/>
+              <a:uFillTx/>
+              <a:latin typeface="Calibri"/>
             </a:endParaRPr>
           </a:p>
         </p:txBody>
@@ -5225,7 +5732,7 @@
       </p:grpSpPr>
       <p:sp>
         <p:nvSpPr>
-          <p:cNvPr id="44" name="PlaceHolder 1"/>
+          <p:cNvPr id="46" name="PlaceHolder 1"/>
           <p:cNvSpPr>
             <a:spLocks noGrp="1"/>
           </p:cNvSpPr>
@@ -5235,8 +5742,8 @@
         </p:nvSpPr>
         <p:spPr>
           <a:xfrm>
-            <a:off x="457200" y="6356520"/>
-            <a:ext cx="2133360" cy="364680"/>
+            <a:off x="378000" y="9909720"/>
+            <a:ext cx="1763640" cy="568800"/>
           </a:xfrm>
           <a:prstGeom prst="rect">
             <a:avLst/>
@@ -5301,7 +5808,7 @@
       </p:sp>
       <p:sp>
         <p:nvSpPr>
-          <p:cNvPr id="45" name="PlaceHolder 2"/>
+          <p:cNvPr id="47" name="PlaceHolder 2"/>
           <p:cNvSpPr>
             <a:spLocks noGrp="1"/>
           </p:cNvSpPr>
@@ -5311,8 +5818,8 @@
         </p:nvSpPr>
         <p:spPr>
           <a:xfrm>
-            <a:off x="3124080" y="6356520"/>
-            <a:ext cx="2895120" cy="364680"/>
+            <a:off x="2582640" y="9909720"/>
+            <a:ext cx="2393640" cy="568800"/>
           </a:xfrm>
           <a:prstGeom prst="rect">
             <a:avLst/>
@@ -5367,7 +5874,7 @@
       </p:sp>
       <p:sp>
         <p:nvSpPr>
-          <p:cNvPr id="46" name="PlaceHolder 3"/>
+          <p:cNvPr id="48" name="PlaceHolder 3"/>
           <p:cNvSpPr>
             <a:spLocks noGrp="1"/>
           </p:cNvSpPr>
@@ -5377,8 +5884,8 @@
         </p:nvSpPr>
         <p:spPr>
           <a:xfrm>
-            <a:off x="6553080" y="6356520"/>
-            <a:ext cx="2133360" cy="364680"/>
+            <a:off x="5417640" y="9909720"/>
+            <a:ext cx="1763640" cy="568800"/>
           </a:xfrm>
           <a:prstGeom prst="rect">
             <a:avLst/>
@@ -5417,7 +5924,7 @@
               </a:lnSpc>
               <a:buNone/>
             </a:pPr>
-            <a:fld id="{A6BE639E-14F2-4A4C-BA8A-E041AB7A325C}" type="slidenum">
+            <a:fld id="{8F850E51-4C48-43EE-8BED-3B98CF3A5292}" type="slidenum">
               <a:rPr lang="en-US" sz="1200" b="0" u="none" strike="noStrike">
                 <a:solidFill>
                   <a:schemeClr val="dk1">
@@ -5437,6 +5944,312 @@
               <a:effectLst/>
               <a:uFillTx/>
               <a:latin typeface="Times New Roman"/>
+            </a:endParaRPr>
+          </a:p>
+        </p:txBody>
+      </p:sp>
+      <p:sp>
+        <p:nvSpPr>
+          <p:cNvPr id="49" name="PlaceHolder 4"/>
+          <p:cNvSpPr>
+            <a:spLocks noGrp="1"/>
+          </p:cNvSpPr>
+          <p:nvPr>
+            <p:ph type="title"/>
+          </p:nvPr>
+        </p:nvSpPr>
+        <p:spPr>
+          <a:xfrm>
+            <a:off x="378000" y="425880"/>
+            <a:ext cx="6803640" cy="1784880"/>
+          </a:xfrm>
+          <a:prstGeom prst="rect">
+            <a:avLst/>
+          </a:prstGeom>
+          <a:noFill/>
+          <a:ln w="0">
+            <a:noFill/>
+          </a:ln>
+        </p:spPr>
+        <p:txBody>
+          <a:bodyPr lIns="0" rIns="0" tIns="0" bIns="0" anchor="ctr">
+            <a:noAutofit/>
+          </a:bodyPr>
+          <a:p>
+            <a:pPr indent="0">
+              <a:buNone/>
+            </a:pPr>
+            <a:r>
+              <a:rPr lang="en-US" sz="2810" b="0" u="none" strike="noStrike">
+                <a:solidFill>
+                  <a:schemeClr val="dk1"/>
+                </a:solidFill>
+                <a:effectLst/>
+                <a:uFillTx/>
+                <a:latin typeface="Calibri"/>
+              </a:rPr>
+              <a:t>Format des Titeltextes durch Klicken bearbeiten</a:t>
+            </a:r>
+            <a:endParaRPr lang="en-US" sz="2810" b="0" u="none" strike="noStrike">
+              <a:solidFill>
+                <a:schemeClr val="dk1"/>
+              </a:solidFill>
+              <a:effectLst/>
+              <a:uFillTx/>
+              <a:latin typeface="Calibri"/>
+            </a:endParaRPr>
+          </a:p>
+        </p:txBody>
+      </p:sp>
+      <p:sp>
+        <p:nvSpPr>
+          <p:cNvPr id="50" name="PlaceHolder 5"/>
+          <p:cNvSpPr>
+            <a:spLocks noGrp="1"/>
+          </p:cNvSpPr>
+          <p:nvPr>
+            <p:ph type="body"/>
+          </p:nvPr>
+        </p:nvSpPr>
+        <p:spPr>
+          <a:xfrm>
+            <a:off x="378000" y="2501280"/>
+            <a:ext cx="6803640" cy="6201000"/>
+          </a:xfrm>
+          <a:prstGeom prst="rect">
+            <a:avLst/>
+          </a:prstGeom>
+          <a:noFill/>
+          <a:ln w="0">
+            <a:noFill/>
+          </a:ln>
+        </p:spPr>
+        <p:txBody>
+          <a:bodyPr lIns="0" rIns="0" tIns="0" bIns="0" anchor="t">
+            <a:normAutofit/>
+          </a:bodyPr>
+          <a:p>
+            <a:pPr marL="432000" indent="-324000">
+              <a:spcBef>
+                <a:spcPts val="2203"/>
+              </a:spcBef>
+              <a:buClr>
+                <a:srgbClr val="000000"/>
+              </a:buClr>
+              <a:buSzPct val="45000"/>
+              <a:buFont typeface="Wingdings" charset="2"/>
+              <a:buChar char=""/>
+            </a:pPr>
+            <a:r>
+              <a:rPr lang="en-US" sz="4990" b="0" u="none" strike="noStrike">
+                <a:solidFill>
+                  <a:schemeClr val="dk1"/>
+                </a:solidFill>
+                <a:effectLst/>
+                <a:uFillTx/>
+                <a:latin typeface="Calibri"/>
+              </a:rPr>
+              <a:t>Format des Gliederungstextes durch Klicken bearbeiten</a:t>
+            </a:r>
+            <a:endParaRPr lang="en-US" sz="4990" b="0" u="none" strike="noStrike">
+              <a:solidFill>
+                <a:schemeClr val="dk1"/>
+              </a:solidFill>
+              <a:effectLst/>
+              <a:uFillTx/>
+              <a:latin typeface="Calibri"/>
+            </a:endParaRPr>
+          </a:p>
+          <a:p>
+            <a:pPr marL="864000" lvl="1" indent="-324000">
+              <a:spcBef>
+                <a:spcPts val="1763"/>
+              </a:spcBef>
+              <a:buClr>
+                <a:srgbClr val="000000"/>
+              </a:buClr>
+              <a:buSzPct val="75000"/>
+              <a:buFont typeface="Symbol" charset="2"/>
+              <a:buChar char=""/>
+            </a:pPr>
+            <a:r>
+              <a:rPr lang="en-US" sz="3740" b="0" u="none" strike="noStrike">
+                <a:solidFill>
+                  <a:schemeClr val="dk1"/>
+                </a:solidFill>
+                <a:effectLst/>
+                <a:uFillTx/>
+                <a:latin typeface="Calibri"/>
+              </a:rPr>
+              <a:t>Zweite Gliederungsebene</a:t>
+            </a:r>
+            <a:endParaRPr lang="en-US" sz="3740" b="0" u="none" strike="noStrike">
+              <a:solidFill>
+                <a:schemeClr val="dk1"/>
+              </a:solidFill>
+              <a:effectLst/>
+              <a:uFillTx/>
+              <a:latin typeface="Calibri"/>
+            </a:endParaRPr>
+          </a:p>
+          <a:p>
+            <a:pPr marL="1296000" lvl="2" indent="-288000">
+              <a:spcBef>
+                <a:spcPts val="1321"/>
+              </a:spcBef>
+              <a:buClr>
+                <a:srgbClr val="000000"/>
+              </a:buClr>
+              <a:buSzPct val="45000"/>
+              <a:buFont typeface="Wingdings" charset="2"/>
+              <a:buChar char=""/>
+            </a:pPr>
+            <a:r>
+              <a:rPr lang="en-US" sz="3120" b="0" u="none" strike="noStrike">
+                <a:solidFill>
+                  <a:schemeClr val="dk1"/>
+                </a:solidFill>
+                <a:effectLst/>
+                <a:uFillTx/>
+                <a:latin typeface="Calibri"/>
+              </a:rPr>
+              <a:t>Dritte Gliederungsebene</a:t>
+            </a:r>
+            <a:endParaRPr lang="en-US" sz="3120" b="0" u="none" strike="noStrike">
+              <a:solidFill>
+                <a:schemeClr val="dk1"/>
+              </a:solidFill>
+              <a:effectLst/>
+              <a:uFillTx/>
+              <a:latin typeface="Calibri"/>
+            </a:endParaRPr>
+          </a:p>
+          <a:p>
+            <a:pPr marL="1728000" lvl="3" indent="-216000">
+              <a:spcBef>
+                <a:spcPts val="882"/>
+              </a:spcBef>
+              <a:buClr>
+                <a:srgbClr val="000000"/>
+              </a:buClr>
+              <a:buSzPct val="75000"/>
+              <a:buFont typeface="Symbol" charset="2"/>
+              <a:buChar char=""/>
+            </a:pPr>
+            <a:r>
+              <a:rPr lang="en-US" sz="3120" b="0" u="none" strike="noStrike">
+                <a:solidFill>
+                  <a:schemeClr val="dk1"/>
+                </a:solidFill>
+                <a:effectLst/>
+                <a:uFillTx/>
+                <a:latin typeface="Calibri"/>
+              </a:rPr>
+              <a:t>Vierte Gliederungsebene</a:t>
+            </a:r>
+            <a:endParaRPr lang="en-US" sz="3120" b="0" u="none" strike="noStrike">
+              <a:solidFill>
+                <a:schemeClr val="dk1"/>
+              </a:solidFill>
+              <a:effectLst/>
+              <a:uFillTx/>
+              <a:latin typeface="Calibri"/>
+            </a:endParaRPr>
+          </a:p>
+          <a:p>
+            <a:pPr marL="2160000" lvl="4" indent="-216000">
+              <a:spcBef>
+                <a:spcPts val="439"/>
+              </a:spcBef>
+              <a:buClr>
+                <a:srgbClr val="000000"/>
+              </a:buClr>
+              <a:buSzPct val="45000"/>
+              <a:buFont typeface="Wingdings" charset="2"/>
+              <a:buChar char=""/>
+            </a:pPr>
+            <a:r>
+              <a:rPr lang="en-US" sz="3120" b="0" u="none" strike="noStrike">
+                <a:solidFill>
+                  <a:schemeClr val="dk1"/>
+                </a:solidFill>
+                <a:effectLst/>
+                <a:uFillTx/>
+                <a:latin typeface="Calibri"/>
+              </a:rPr>
+              <a:t>Fünfte Gliederungsebene</a:t>
+            </a:r>
+            <a:endParaRPr lang="en-US" sz="3120" b="0" u="none" strike="noStrike">
+              <a:solidFill>
+                <a:schemeClr val="dk1"/>
+              </a:solidFill>
+              <a:effectLst/>
+              <a:uFillTx/>
+              <a:latin typeface="Calibri"/>
+            </a:endParaRPr>
+          </a:p>
+          <a:p>
+            <a:pPr marL="2592000" lvl="5" indent="-216000">
+              <a:spcBef>
+                <a:spcPts val="439"/>
+              </a:spcBef>
+              <a:buClr>
+                <a:srgbClr val="000000"/>
+              </a:buClr>
+              <a:buSzPct val="45000"/>
+              <a:buFont typeface="Wingdings" charset="2"/>
+              <a:buChar char=""/>
+            </a:pPr>
+            <a:r>
+              <a:rPr lang="en-US" sz="3120" b="0" u="none" strike="noStrike">
+                <a:solidFill>
+                  <a:schemeClr val="dk1"/>
+                </a:solidFill>
+                <a:effectLst/>
+                <a:uFillTx/>
+                <a:latin typeface="Calibri"/>
+              </a:rPr>
+              <a:t>Sechste Gliederungsebene</a:t>
+            </a:r>
+            <a:endParaRPr lang="en-US" sz="3120" b="0" u="none" strike="noStrike">
+              <a:solidFill>
+                <a:schemeClr val="dk1"/>
+              </a:solidFill>
+              <a:effectLst/>
+              <a:uFillTx/>
+              <a:latin typeface="Calibri"/>
+            </a:endParaRPr>
+          </a:p>
+          <a:p>
+            <a:pPr marL="3024000" lvl="6" indent="-216000">
+              <a:spcBef>
+                <a:spcPts val="439"/>
+              </a:spcBef>
+              <a:buClr>
+                <a:srgbClr val="000000"/>
+              </a:buClr>
+              <a:buSzPct val="45000"/>
+              <a:buFont typeface="Wingdings" charset="2"/>
+              <a:buChar char=""/>
+            </a:pPr>
+            <a:r>
+              <a:rPr lang="en-US" sz="3120" b="0" u="none" strike="noStrike">
+                <a:solidFill>
+                  <a:schemeClr val="dk1"/>
+                </a:solidFill>
+                <a:effectLst/>
+                <a:uFillTx/>
+                <a:latin typeface="Calibri"/>
+              </a:rPr>
+              <a:t>Siebte Gliederungsebene</a:t>
+            </a:r>
+            <a:endParaRPr lang="en-US" sz="3120" b="0" u="none" strike="noStrike">
+              <a:solidFill>
+                <a:schemeClr val="dk1"/>
+              </a:solidFill>
+              <a:effectLst/>
+              <a:uFillTx/>
+              <a:latin typeface="Calibri"/>
             </a:endParaRPr>
           </a:p>
         </p:txBody>
@@ -5501,14 +6314,14 @@
       </p:grpSpPr>
       <p:sp>
         <p:nvSpPr>
-          <p:cNvPr id="59" name="TextBox 1"/>
+          <p:cNvPr id="63" name="TextBox 1"/>
           <p:cNvSpPr/>
           <p:nvPr/>
         </p:nvSpPr>
         <p:spPr>
           <a:xfrm>
-            <a:off x="640080" y="365760"/>
-            <a:ext cx="7863480" cy="822600"/>
+            <a:off x="377640" y="426960"/>
+            <a:ext cx="2655000" cy="517320"/>
           </a:xfrm>
           <a:prstGeom prst="rect">
             <a:avLst/>
@@ -5525,7 +6338,7 @@
           <a:fontRef idx="minor"/>
         </p:style>
         <p:txBody>
-          <a:bodyPr lIns="90000" rIns="90000" tIns="45000" bIns="45000" anchor="t">
+          <a:bodyPr wrap="none" lIns="90000" rIns="90000" tIns="45000" bIns="45000" anchor="t">
             <a:spAutoFit/>
           </a:bodyPr>
           <a:p>
@@ -5558,14 +6371,14 @@
       </p:sp>
       <p:sp>
         <p:nvSpPr>
-          <p:cNvPr id="60" name="TextBox 2"/>
+          <p:cNvPr id="64" name="TextBox 2"/>
           <p:cNvSpPr/>
           <p:nvPr/>
         </p:nvSpPr>
         <p:spPr>
           <a:xfrm>
-            <a:off x="640080" y="1463040"/>
-            <a:ext cx="7863480" cy="319680"/>
+            <a:off x="377640" y="4399920"/>
+            <a:ext cx="6803640" cy="807120"/>
           </a:xfrm>
           <a:prstGeom prst="rect">
             <a:avLst/>
@@ -5582,7 +6395,7 @@
           <a:fontRef idx="minor"/>
         </p:style>
         <p:txBody>
-          <a:bodyPr lIns="90000" rIns="90000" tIns="45000" bIns="45000" anchor="t">
+          <a:bodyPr lIns="90000" rIns="90000" tIns="45000" bIns="45000" anchor="t" anchorCtr="1">
             <a:spAutoFit/>
           </a:bodyPr>
           <a:p>
@@ -5592,17 +6405,17 @@
               </a:lnSpc>
             </a:pPr>
             <a:r>
-              <a:rPr lang="en-US" sz="1600" b="1" u="none" strike="noStrike">
-                <a:solidFill>
-                  <a:schemeClr val="dk1"/>
-                </a:solidFill>
-                <a:effectLst/>
-                <a:uFillTx/>
-                <a:latin typeface="Calibri"/>
-              </a:rPr>
-              <a:t>Resumen Profesional</a:t>
-            </a:r>
-            <a:endParaRPr lang="de-DE" sz="1600" b="0" u="none" strike="noStrike">
+              <a:rPr lang="en-US" sz="1400" b="1" u="none" strike="noStrike">
+                <a:solidFill>
+                  <a:schemeClr val="dk1"/>
+                </a:solidFill>
+                <a:effectLst/>
+                <a:uFillTx/>
+                <a:latin typeface="Calibri"/>
+              </a:rPr>
+              <a:t>Juan Pérez</a:t>
+            </a:r>
+            <a:endParaRPr lang="de-DE" sz="1400" b="0" u="none" strike="noStrike">
               <a:solidFill>
                 <a:srgbClr val="000000"/>
               </a:solidFill>
@@ -5611,18 +6424,96 @@
               <a:latin typeface="Arial"/>
             </a:endParaRPr>
           </a:p>
-        </p:txBody>
-      </p:sp>
-      <p:sp>
-        <p:nvSpPr>
-          <p:cNvPr id="61" name="TextBox 3"/>
+          <a:p>
+            <a:pPr algn="ctr" defTabSz="457200">
+              <a:lnSpc>
+                <a:spcPct val="100000"/>
+              </a:lnSpc>
+            </a:pPr>
+            <a:r>
+              <a:rPr lang="en-US" sz="1100" b="0" u="none" strike="noStrike">
+                <a:solidFill>
+                  <a:schemeClr val="dk1"/>
+                </a:solidFill>
+                <a:effectLst/>
+                <a:uFillTx/>
+                <a:latin typeface="Calibri"/>
+              </a:rPr>
+              <a:t>Calle de la Industria 27, 4º B, 28045 Madrid, España</a:t>
+            </a:r>
+            <a:endParaRPr lang="de-DE" sz="1100" b="0" u="none" strike="noStrike">
+              <a:solidFill>
+                <a:srgbClr val="000000"/>
+              </a:solidFill>
+              <a:effectLst/>
+              <a:uFillTx/>
+              <a:latin typeface="Arial"/>
+            </a:endParaRPr>
+          </a:p>
+          <a:p>
+            <a:pPr defTabSz="457200">
+              <a:lnSpc>
+                <a:spcPct val="100000"/>
+              </a:lnSpc>
+            </a:pPr>
+            <a:r>
+              <a:rPr lang="en-US" sz="1100" b="0" u="none" strike="noStrike">
+                <a:solidFill>
+                  <a:schemeClr val="dk1"/>
+                </a:solidFill>
+                <a:effectLst/>
+                <a:uFillTx/>
+                <a:latin typeface="Calibri"/>
+              </a:rPr>
+              <a:t>juan.perez@ejemplo.com  |  +34 612 345 678</a:t>
+            </a:r>
+            <a:endParaRPr lang="de-DE" sz="1100" b="0" u="none" strike="noStrike">
+              <a:solidFill>
+                <a:srgbClr val="000000"/>
+              </a:solidFill>
+              <a:effectLst/>
+              <a:uFillTx/>
+              <a:latin typeface="Arial"/>
+            </a:endParaRPr>
+          </a:p>
+          <a:p>
+            <a:pPr defTabSz="457200">
+              <a:lnSpc>
+                <a:spcPct val="100000"/>
+              </a:lnSpc>
+            </a:pPr>
+            <a:r>
+              <a:rPr lang="en-US" sz="1100" b="0" u="none" strike="noStrike">
+                <a:solidFill>
+                  <a:schemeClr val="dk1"/>
+                </a:solidFill>
+                <a:effectLst/>
+                <a:uFillTx/>
+                <a:latin typeface="Calibri"/>
+              </a:rPr>
+              <a:t>linkedin.com/in/juanperez-ingenieria</a:t>
+            </a:r>
+            <a:endParaRPr lang="de-DE" sz="1100" b="0" u="none" strike="noStrike">
+              <a:solidFill>
+                <a:srgbClr val="000000"/>
+              </a:solidFill>
+              <a:effectLst/>
+              <a:uFillTx/>
+              <a:latin typeface="Arial"/>
+            </a:endParaRPr>
+          </a:p>
+        </p:txBody>
+      </p:sp>
+      <p:sp>
+        <p:nvSpPr>
+          <p:cNvPr id="65" name="TextBox 3"/>
           <p:cNvSpPr/>
           <p:nvPr/>
         </p:nvSpPr>
         <p:spPr>
           <a:xfrm>
-            <a:off x="640080" y="1783080"/>
-            <a:ext cx="7863480" cy="639720"/>
+            <a:off x="377640" y="6110640"/>
+            <a:ext cx="1951560" cy="334080"/>
           </a:xfrm>
           <a:prstGeom prst="rect">
             <a:avLst/>
@@ -5639,7 +6530,7 @@
           <a:fontRef idx="minor"/>
         </p:style>
         <p:txBody>
-          <a:bodyPr lIns="90000" rIns="90000" tIns="45000" bIns="45000" anchor="t">
+          <a:bodyPr wrap="none" lIns="90000" rIns="90000" tIns="45000" bIns="45000" anchor="t">
             <a:spAutoFit/>
           </a:bodyPr>
           <a:p>
@@ -5649,17 +6540,17 @@
               </a:lnSpc>
             </a:pPr>
             <a:r>
-              <a:rPr lang="en-US" sz="1200" b="0" u="none" strike="noStrike">
-                <a:solidFill>
-                  <a:schemeClr val="dk1"/>
-                </a:solidFill>
-                <a:effectLst/>
-                <a:uFillTx/>
-                <a:latin typeface="Calibri"/>
-              </a:rPr>
-              <a:t>[professional_summary]</a:t>
-            </a:r>
-            <a:endParaRPr lang="de-DE" sz="1200" b="0" u="none" strike="noStrike">
+              <a:rPr lang="en-US" sz="1600" b="1" u="none" strike="noStrike">
+                <a:solidFill>
+                  <a:schemeClr val="dk1"/>
+                </a:solidFill>
+                <a:effectLst/>
+                <a:uFillTx/>
+                <a:latin typeface="Calibri"/>
+              </a:rPr>
+              <a:t>Resumen Profesional</a:t>
+            </a:r>
+            <a:endParaRPr lang="de-DE" sz="1600" b="0" u="none" strike="noStrike">
               <a:solidFill>
                 <a:srgbClr val="000000"/>
               </a:solidFill>
@@ -5672,14 +6563,14 @@
       </p:sp>
       <p:sp>
         <p:nvSpPr>
-          <p:cNvPr id="62" name="TextBox 4"/>
+          <p:cNvPr id="66" name="TextBox 4"/>
           <p:cNvSpPr/>
           <p:nvPr/>
         </p:nvSpPr>
         <p:spPr>
           <a:xfrm>
-            <a:off x="640080" y="2651760"/>
-            <a:ext cx="7863480" cy="319680"/>
+            <a:off x="377640" y="6680520"/>
+            <a:ext cx="6803640" cy="273240"/>
           </a:xfrm>
           <a:prstGeom prst="rect">
             <a:avLst/>
@@ -5706,17 +6597,17 @@
               </a:lnSpc>
             </a:pPr>
             <a:r>
-              <a:rPr lang="en-US" sz="1600" b="1" u="none" strike="noStrike">
-                <a:solidFill>
-                  <a:schemeClr val="dk1"/>
-                </a:solidFill>
-                <a:effectLst/>
-                <a:uFillTx/>
-                <a:latin typeface="Calibri"/>
-              </a:rPr>
-              <a:t>Educación de Pregrado</a:t>
-            </a:r>
-            <a:endParaRPr lang="de-DE" sz="1600" b="0" u="none" strike="noStrike">
+              <a:rPr lang="en-US" sz="1200" b="0" i="1" u="none" strike="noStrike">
+                <a:solidFill>
+                  <a:schemeClr val="dk1"/>
+                </a:solidFill>
+                <a:effectLst/>
+                <a:uFillTx/>
+                <a:latin typeface="Calibri"/>
+              </a:rPr>
+              <a:t>[professional_summary]</a:t>
+            </a:r>
+            <a:endParaRPr lang="de-DE" sz="1200" b="0" u="none" strike="noStrike">
               <a:solidFill>
                 <a:srgbClr val="000000"/>
               </a:solidFill>
@@ -5729,21 +6620,25 @@
       </p:sp>
       <p:sp>
         <p:nvSpPr>
-          <p:cNvPr id="63" name="TextBox 5"/>
+          <p:cNvPr id="67" name=""/>
           <p:cNvSpPr/>
           <p:nvPr/>
         </p:nvSpPr>
         <p:spPr>
           <a:xfrm>
-            <a:off x="640080" y="2971800"/>
-            <a:ext cx="7863480" cy="639720"/>
-          </a:xfrm>
-          <a:prstGeom prst="rect">
-            <a:avLst/>
-          </a:prstGeom>
-          <a:noFill/>
-          <a:ln w="0">
-            <a:noFill/>
+            <a:off x="2859840" y="1571040"/>
+            <a:ext cx="1980000" cy="2252880"/>
+          </a:xfrm>
+          <a:prstGeom prst="rect">
+            <a:avLst/>
+          </a:prstGeom>
+          <a:solidFill>
+            <a:srgbClr val="ffffff"/>
+          </a:solidFill>
+          <a:ln w="0">
+            <a:solidFill>
+              <a:srgbClr val="3465a4"/>
+            </a:solidFill>
           </a:ln>
         </p:spPr>
         <p:style>
@@ -5753,54 +6648,45 @@
           <a:fontRef idx="minor"/>
         </p:style>
         <p:txBody>
-          <a:bodyPr lIns="90000" rIns="90000" tIns="45000" bIns="45000" anchor="t">
-            <a:spAutoFit/>
-          </a:bodyPr>
-          <a:p>
-            <a:pPr defTabSz="457200">
-              <a:lnSpc>
-                <a:spcPct val="100000"/>
-              </a:lnSpc>
-            </a:pPr>
-            <a:r>
-              <a:rPr lang="en-US" sz="1200" b="0" u="none" strike="noStrike">
-                <a:solidFill>
-                  <a:schemeClr val="dk1"/>
-                </a:solidFill>
-                <a:effectLst/>
-                <a:uFillTx/>
-                <a:latin typeface="Calibri"/>
-              </a:rPr>
-              <a:t>[bachelor_subjects]</a:t>
-            </a:r>
-            <a:endParaRPr lang="de-DE" sz="1200" b="0" u="none" strike="noStrike">
+          <a:bodyPr lIns="90000" rIns="90000" tIns="45000" bIns="45000" anchor="ctr">
+            <a:noAutofit/>
+          </a:bodyPr>
+          <a:p>
+            <a:endParaRPr lang="de-DE" sz="1800" b="0" u="none" strike="noStrike">
               <a:solidFill>
                 <a:srgbClr val="000000"/>
               </a:solidFill>
               <a:effectLst/>
               <a:uFillTx/>
               <a:latin typeface="Arial"/>
-            </a:endParaRPr>
-          </a:p>
-        </p:txBody>
-      </p:sp>
-      <p:sp>
-        <p:nvSpPr>
-          <p:cNvPr id="64" name="TextBox 6"/>
+              <a:ea typeface="Microsoft YaHei"/>
+            </a:endParaRPr>
+          </a:p>
+        </p:txBody>
+      </p:sp>
+      <p:sp>
+        <p:nvSpPr>
+          <p:cNvPr id="68" name=""/>
           <p:cNvSpPr/>
           <p:nvPr/>
         </p:nvSpPr>
         <p:spPr>
           <a:xfrm>
-            <a:off x="640080" y="3840480"/>
-            <a:ext cx="7863480" cy="319680"/>
-          </a:xfrm>
-          <a:prstGeom prst="rect">
-            <a:avLst/>
-          </a:prstGeom>
-          <a:noFill/>
-          <a:ln w="0">
-            <a:noFill/>
+            <a:off x="3111840" y="1751040"/>
+            <a:ext cx="1404000" cy="1440000"/>
+          </a:xfrm>
+          <a:prstGeom prst="smileyFace">
+            <a:avLst>
+              <a:gd name="adj" fmla="val 9282"/>
+            </a:avLst>
+          </a:prstGeom>
+          <a:solidFill>
+            <a:srgbClr val="729fcf"/>
+          </a:solidFill>
+          <a:ln w="0">
+            <a:solidFill>
+              <a:srgbClr val="3465a4"/>
+            </a:solidFill>
           </a:ln>
         </p:spPr>
         <p:style>
@@ -5810,54 +6696,43 @@
           <a:fontRef idx="minor"/>
         </p:style>
         <p:txBody>
-          <a:bodyPr lIns="90000" rIns="90000" tIns="45000" bIns="45000" anchor="t">
-            <a:spAutoFit/>
-          </a:bodyPr>
-          <a:p>
-            <a:pPr defTabSz="457200">
-              <a:lnSpc>
-                <a:spcPct val="100000"/>
-              </a:lnSpc>
-            </a:pPr>
-            <a:r>
-              <a:rPr lang="en-US" sz="1600" b="1" u="none" strike="noStrike">
-                <a:solidFill>
-                  <a:schemeClr val="dk1"/>
-                </a:solidFill>
-                <a:effectLst/>
-                <a:uFillTx/>
-                <a:latin typeface="Calibri"/>
-              </a:rPr>
-              <a:t>Educación de Maestría</a:t>
-            </a:r>
-            <a:endParaRPr lang="de-DE" sz="1600" b="0" u="none" strike="noStrike">
+          <a:bodyPr lIns="90000" rIns="90000" tIns="45000" bIns="45000" anchor="ctr">
+            <a:noAutofit/>
+          </a:bodyPr>
+          <a:p>
+            <a:endParaRPr lang="de-DE" sz="1800" b="0" u="none" strike="noStrike">
               <a:solidFill>
                 <a:srgbClr val="000000"/>
               </a:solidFill>
               <a:effectLst/>
               <a:uFillTx/>
               <a:latin typeface="Arial"/>
-            </a:endParaRPr>
-          </a:p>
-        </p:txBody>
-      </p:sp>
-      <p:sp>
-        <p:nvSpPr>
-          <p:cNvPr id="65" name="TextBox 7"/>
+              <a:ea typeface="Microsoft YaHei"/>
+            </a:endParaRPr>
+          </a:p>
+        </p:txBody>
+      </p:sp>
+      <p:sp>
+        <p:nvSpPr>
+          <p:cNvPr id="69" name=""/>
           <p:cNvSpPr/>
           <p:nvPr/>
         </p:nvSpPr>
         <p:spPr>
           <a:xfrm>
-            <a:off x="640080" y="4160520"/>
-            <a:ext cx="7863480" cy="639720"/>
-          </a:xfrm>
-          <a:prstGeom prst="rect">
-            <a:avLst/>
-          </a:prstGeom>
-          <a:noFill/>
-          <a:ln w="0">
-            <a:noFill/>
+            <a:off x="3255840" y="3299040"/>
+            <a:ext cx="1260000" cy="360000"/>
+          </a:xfrm>
+          <a:prstGeom prst="rect">
+            <a:avLst/>
+          </a:prstGeom>
+          <a:solidFill>
+            <a:srgbClr val="ffffff"/>
+          </a:solidFill>
+          <a:ln w="0">
+            <a:solidFill>
+              <a:srgbClr val="8d281e"/>
+            </a:solidFill>
           </a:ln>
         </p:spPr>
         <p:style>
@@ -5867,58 +6742,86 @@
           <a:fontRef idx="minor"/>
         </p:style>
         <p:txBody>
-          <a:bodyPr lIns="90000" rIns="90000" tIns="45000" bIns="45000" anchor="t">
-            <a:spAutoFit/>
-          </a:bodyPr>
-          <a:p>
-            <a:pPr defTabSz="457200">
-              <a:lnSpc>
-                <a:spcPct val="100000"/>
-              </a:lnSpc>
-            </a:pPr>
-            <a:r>
-              <a:rPr lang="en-US" sz="1200" b="0" u="none" strike="noStrike">
-                <a:solidFill>
-                  <a:schemeClr val="dk1"/>
-                </a:solidFill>
-                <a:effectLst/>
-                <a:uFillTx/>
-                <a:latin typeface="Calibri"/>
-              </a:rPr>
-              <a:t>[master_subjects]</a:t>
-            </a:r>
-            <a:endParaRPr lang="de-DE" sz="1200" b="0" u="none" strike="noStrike">
+          <a:bodyPr lIns="90000" rIns="90000" tIns="45000" bIns="45000" anchor="ctr">
+            <a:noAutofit/>
+          </a:bodyPr>
+          <a:p>
+            <a:pPr algn="ctr">
+              <a:lnSpc>
+                <a:spcPct val="100000"/>
+              </a:lnSpc>
+            </a:pPr>
+            <a:r>
+              <a:rPr lang="de-DE" sz="1800" b="0" u="none" strike="noStrike">
+                <a:solidFill>
+                  <a:srgbClr val="000000"/>
+                </a:solidFill>
+                <a:effectLst/>
+                <a:uFillTx/>
+                <a:latin typeface="Arial"/>
+                <a:ea typeface="Microsoft YaHei"/>
+              </a:rPr>
+              <a:t>PHOTO</a:t>
+            </a:r>
+            <a:endParaRPr lang="de-DE" sz="1800" b="0" u="none" strike="noStrike">
               <a:solidFill>
                 <a:srgbClr val="000000"/>
               </a:solidFill>
               <a:effectLst/>
               <a:uFillTx/>
               <a:latin typeface="Arial"/>
-            </a:endParaRPr>
-          </a:p>
-        </p:txBody>
-      </p:sp>
-      <p:sp>
-        <p:nvSpPr>
-          <p:cNvPr id="66" name=""/>
+              <a:ea typeface="Microsoft YaHei"/>
+            </a:endParaRPr>
+          </a:p>
+        </p:txBody>
+      </p:sp>
+    </p:spTree>
+  </p:cSld>
+  <mc:AlternateContent>
+    <mc:Choice Requires="p14">
+      <p:transition spd="slow" p14:dur="2000"/>
+    </mc:Choice>
+    <mc:Fallback>
+      <p:transition spd="slow"/>
+    </mc:Fallback>
+  </mc:AlternateContent>
+</p:sld>
+</file>
+
+<file path=ppt/slides/slide2.xml><?xml version="1.0" encoding="utf-8"?>
+<p:sld xmlns:a="http://schemas.openxmlformats.org/drawingml/2006/main" xmlns:p="http://schemas.openxmlformats.org/presentationml/2006/main" xmlns:r="http://schemas.openxmlformats.org/officeDocument/2006/relationships" xmlns:p14="http://schemas.microsoft.com/office/powerpoint/2010/main" xmlns:p15="http://schemas.microsoft.com/office/powerpoint/2012/main" xmlns:mc="http://schemas.openxmlformats.org/markup-compatibility/2006">
+  <p:cSld>
+    <p:spTree>
+      <p:nvGrpSpPr>
+        <p:cNvPr id="1" name=""/>
+        <p:cNvGrpSpPr/>
+        <p:nvPr/>
+      </p:nvGrpSpPr>
+      <p:grpSpPr>
+        <a:xfrm>
+          <a:off x="0" y="0"/>
+          <a:ext cx="0" cy="0"/>
+          <a:chOff x="0" y="0"/>
+          <a:chExt cx="0" cy="0"/>
+        </a:xfrm>
+      </p:grpSpPr>
+      <p:sp>
+        <p:nvSpPr>
+          <p:cNvPr id="70" name="TextBox 1"/>
           <p:cNvSpPr/>
           <p:nvPr/>
         </p:nvSpPr>
         <p:spPr>
           <a:xfrm>
-            <a:off x="6660000" y="360000"/>
-            <a:ext cx="1620000" cy="1980000"/>
-          </a:xfrm>
-          <a:prstGeom prst="rect">
-            <a:avLst/>
-          </a:prstGeom>
-          <a:solidFill>
-            <a:srgbClr val="ffffff"/>
-          </a:solidFill>
-          <a:ln w="0">
-            <a:solidFill>
-              <a:srgbClr val="3465a4"/>
-            </a:solidFill>
+            <a:off x="377640" y="426960"/>
+            <a:ext cx="2143080" cy="334080"/>
+          </a:xfrm>
+          <a:prstGeom prst="rect">
+            <a:avLst/>
+          </a:prstGeom>
+          <a:noFill/>
+          <a:ln w="0">
+            <a:noFill/>
           </a:ln>
         </p:spPr>
         <p:style>
@@ -5928,45 +6831,54 @@
           <a:fontRef idx="minor"/>
         </p:style>
         <p:txBody>
-          <a:bodyPr lIns="90000" rIns="90000" tIns="45000" bIns="45000" anchor="ctr">
-            <a:noAutofit/>
-          </a:bodyPr>
-          <a:p>
-            <a:endParaRPr lang="de-DE" sz="1800" b="0" u="none" strike="noStrike">
+          <a:bodyPr wrap="none" lIns="90000" rIns="90000" tIns="45000" bIns="45000" anchor="t">
+            <a:spAutoFit/>
+          </a:bodyPr>
+          <a:p>
+            <a:pPr defTabSz="457200">
+              <a:lnSpc>
+                <a:spcPct val="100000"/>
+              </a:lnSpc>
+            </a:pPr>
+            <a:r>
+              <a:rPr lang="en-US" sz="1600" b="1" u="none" strike="noStrike">
+                <a:solidFill>
+                  <a:schemeClr val="dk1"/>
+                </a:solidFill>
+                <a:effectLst/>
+                <a:uFillTx/>
+                <a:latin typeface="Calibri"/>
+              </a:rPr>
+              <a:t>Experiencia Profesional</a:t>
+            </a:r>
+            <a:endParaRPr lang="de-DE" sz="1600" b="0" u="none" strike="noStrike">
               <a:solidFill>
                 <a:srgbClr val="000000"/>
               </a:solidFill>
               <a:effectLst/>
               <a:uFillTx/>
               <a:latin typeface="Arial"/>
-              <a:ea typeface="Microsoft YaHei"/>
-            </a:endParaRPr>
-          </a:p>
-        </p:txBody>
-      </p:sp>
-      <p:sp>
-        <p:nvSpPr>
-          <p:cNvPr id="67" name=""/>
+            </a:endParaRPr>
+          </a:p>
+        </p:txBody>
+      </p:sp>
+      <p:sp>
+        <p:nvSpPr>
+          <p:cNvPr id="71" name="TextBox 2"/>
           <p:cNvSpPr/>
           <p:nvPr/>
         </p:nvSpPr>
         <p:spPr>
           <a:xfrm>
-            <a:off x="6948000" y="540000"/>
-            <a:ext cx="1080000" cy="1062720"/>
-          </a:xfrm>
-          <a:prstGeom prst="smileyFace">
-            <a:avLst>
-              <a:gd name="adj" fmla="val 9282"/>
-            </a:avLst>
-          </a:prstGeom>
-          <a:solidFill>
-            <a:srgbClr val="729fcf"/>
-          </a:solidFill>
-          <a:ln w="0">
-            <a:solidFill>
-              <a:srgbClr val="3465a4"/>
-            </a:solidFill>
+            <a:off x="377640" y="1068840"/>
+            <a:ext cx="6803640" cy="425160"/>
+          </a:xfrm>
+          <a:prstGeom prst="rect">
+            <a:avLst/>
+          </a:prstGeom>
+          <a:noFill/>
+          <a:ln w="0">
+            <a:noFill/>
           </a:ln>
         </p:spPr>
         <p:style>
@@ -5976,43 +6888,54 @@
           <a:fontRef idx="minor"/>
         </p:style>
         <p:txBody>
-          <a:bodyPr lIns="90000" rIns="90000" tIns="45000" bIns="45000" anchor="ctr">
-            <a:noAutofit/>
-          </a:bodyPr>
-          <a:p>
-            <a:endParaRPr lang="de-DE" sz="1800" b="0" u="none" strike="noStrike">
+          <a:bodyPr lIns="90000" rIns="90000" tIns="45000" bIns="45000" anchor="t">
+            <a:spAutoFit/>
+          </a:bodyPr>
+          <a:p>
+            <a:pPr defTabSz="457200">
+              <a:lnSpc>
+                <a:spcPct val="100000"/>
+              </a:lnSpc>
+            </a:pPr>
+            <a:r>
+              <a:rPr lang="en-US" sz="1100" b="1" u="none" strike="noStrike">
+                <a:solidFill>
+                  <a:schemeClr val="dk1"/>
+                </a:solidFill>
+                <a:effectLst/>
+                <a:uFillTx/>
+                <a:latin typeface="Calibri"/>
+              </a:rPr>
+              <a:t>Investigador Predoctoral - Laboratorio de CFD y Energías Renovables, UPM  |  Madrid, España  |  Sep 2022 - Jun 2023</a:t>
+            </a:r>
+            <a:endParaRPr lang="de-DE" sz="1100" b="0" u="none" strike="noStrike">
               <a:solidFill>
                 <a:srgbClr val="000000"/>
               </a:solidFill>
               <a:effectLst/>
               <a:uFillTx/>
               <a:latin typeface="Arial"/>
-              <a:ea typeface="Microsoft YaHei"/>
-            </a:endParaRPr>
-          </a:p>
-        </p:txBody>
-      </p:sp>
-      <p:sp>
-        <p:nvSpPr>
-          <p:cNvPr id="68" name=""/>
+            </a:endParaRPr>
+          </a:p>
+        </p:txBody>
+      </p:sp>
+      <p:sp>
+        <p:nvSpPr>
+          <p:cNvPr id="72" name="TextBox 3"/>
           <p:cNvSpPr/>
           <p:nvPr/>
         </p:nvSpPr>
         <p:spPr>
           <a:xfrm>
-            <a:off x="6840000" y="1800000"/>
-            <a:ext cx="1260000" cy="360000"/>
-          </a:xfrm>
-          <a:prstGeom prst="rect">
-            <a:avLst/>
-          </a:prstGeom>
-          <a:solidFill>
-            <a:srgbClr val="ffffff"/>
-          </a:solidFill>
-          <a:ln w="0">
-            <a:solidFill>
-              <a:srgbClr val="8d281e"/>
-            </a:solidFill>
+            <a:off x="528840" y="1524960"/>
+            <a:ext cx="6652440" cy="243000"/>
+          </a:xfrm>
+          <a:prstGeom prst="rect">
+            <a:avLst/>
+          </a:prstGeom>
+          <a:noFill/>
+          <a:ln w="0">
+            <a:noFill/>
           </a:ln>
         </p:spPr>
         <p:style>
@@ -6022,35 +6945,1059 @@
           <a:fontRef idx="minor"/>
         </p:style>
         <p:txBody>
-          <a:bodyPr lIns="90000" rIns="90000" tIns="45000" bIns="45000" anchor="ctr">
-            <a:noAutofit/>
-          </a:bodyPr>
-          <a:p>
-            <a:pPr algn="ctr">
-              <a:lnSpc>
-                <a:spcPct val="100000"/>
-              </a:lnSpc>
-            </a:pPr>
-            <a:r>
-              <a:rPr lang="de-DE" sz="1800" b="0" u="none" strike="noStrike">
-                <a:solidFill>
-                  <a:srgbClr val="000000"/>
-                </a:solidFill>
-                <a:effectLst/>
-                <a:uFillTx/>
-                <a:latin typeface="Arial"/>
-                <a:ea typeface="Microsoft YaHei"/>
-              </a:rPr>
-              <a:t>PHOTO</a:t>
-            </a:r>
-            <a:endParaRPr lang="de-DE" sz="1800" b="0" u="none" strike="noStrike">
+          <a:bodyPr lIns="90000" rIns="90000" tIns="45000" bIns="45000" anchor="t">
+            <a:spAutoFit/>
+          </a:bodyPr>
+          <a:p>
+            <a:pPr defTabSz="457200">
+              <a:lnSpc>
+                <a:spcPct val="100000"/>
+              </a:lnSpc>
+            </a:pPr>
+            <a:r>
+              <a:rPr lang="en-US" sz="1000" b="0" u="none" strike="noStrike">
+                <a:solidFill>
+                  <a:schemeClr val="dk1"/>
+                </a:solidFill>
+                <a:effectLst/>
+                <a:uFillTx/>
+                <a:latin typeface="Calibri"/>
+              </a:rPr>
+              <a:t>Desarrollo de modelos CFD Actuator-Line de alta fidelidad para aerogeneradores de eje vertical.</a:t>
+            </a:r>
+            <a:endParaRPr lang="de-DE" sz="1000" b="0" u="none" strike="noStrike">
               <a:solidFill>
                 <a:srgbClr val="000000"/>
               </a:solidFill>
               <a:effectLst/>
               <a:uFillTx/>
               <a:latin typeface="Arial"/>
-              <a:ea typeface="Microsoft YaHei"/>
+            </a:endParaRPr>
+          </a:p>
+        </p:txBody>
+      </p:sp>
+      <p:sp>
+        <p:nvSpPr>
+          <p:cNvPr id="73" name="TextBox 4"/>
+          <p:cNvSpPr/>
+          <p:nvPr/>
+        </p:nvSpPr>
+        <p:spPr>
+          <a:xfrm>
+            <a:off x="528840" y="1866600"/>
+            <a:ext cx="6652440" cy="243000"/>
+          </a:xfrm>
+          <a:prstGeom prst="rect">
+            <a:avLst/>
+          </a:prstGeom>
+          <a:noFill/>
+          <a:ln w="0">
+            <a:noFill/>
+          </a:ln>
+        </p:spPr>
+        <p:style>
+          <a:lnRef idx="0"/>
+          <a:fillRef idx="0"/>
+          <a:effectRef idx="0"/>
+          <a:fontRef idx="minor"/>
+        </p:style>
+        <p:txBody>
+          <a:bodyPr lIns="90000" rIns="90000" tIns="45000" bIns="45000" anchor="t">
+            <a:spAutoFit/>
+          </a:bodyPr>
+          <a:p>
+            <a:pPr defTabSz="457200">
+              <a:lnSpc>
+                <a:spcPct val="100000"/>
+              </a:lnSpc>
+            </a:pPr>
+            <a:r>
+              <a:rPr lang="en-US" sz="1000" b="0" u="none" strike="noStrike">
+                <a:solidFill>
+                  <a:schemeClr val="dk1"/>
+                </a:solidFill>
+                <a:effectLst/>
+                <a:uFillTx/>
+                <a:latin typeface="Calibri"/>
+              </a:rPr>
+              <a:t>Simulación de interacciones de estela en parques de hasta 12 turbinas; mejora del 15% en densidad de potencia.</a:t>
+            </a:r>
+            <a:endParaRPr lang="de-DE" sz="1000" b="0" u="none" strike="noStrike">
+              <a:solidFill>
+                <a:srgbClr val="000000"/>
+              </a:solidFill>
+              <a:effectLst/>
+              <a:uFillTx/>
+              <a:latin typeface="Arial"/>
+            </a:endParaRPr>
+          </a:p>
+        </p:txBody>
+      </p:sp>
+      <p:sp>
+        <p:nvSpPr>
+          <p:cNvPr id="74" name="TextBox 5"/>
+          <p:cNvSpPr/>
+          <p:nvPr/>
+        </p:nvSpPr>
+        <p:spPr>
+          <a:xfrm>
+            <a:off x="528840" y="2209320"/>
+            <a:ext cx="6652440" cy="243000"/>
+          </a:xfrm>
+          <a:prstGeom prst="rect">
+            <a:avLst/>
+          </a:prstGeom>
+          <a:noFill/>
+          <a:ln w="0">
+            <a:noFill/>
+          </a:ln>
+        </p:spPr>
+        <p:style>
+          <a:lnRef idx="0"/>
+          <a:fillRef idx="0"/>
+          <a:effectRef idx="0"/>
+          <a:fontRef idx="minor"/>
+        </p:style>
+        <p:txBody>
+          <a:bodyPr lIns="90000" rIns="90000" tIns="45000" bIns="45000" anchor="t">
+            <a:spAutoFit/>
+          </a:bodyPr>
+          <a:p>
+            <a:pPr defTabSz="457200">
+              <a:lnSpc>
+                <a:spcPct val="100000"/>
+              </a:lnSpc>
+            </a:pPr>
+            <a:r>
+              <a:rPr lang="en-US" sz="1000" b="0" u="none" strike="noStrike">
+                <a:solidFill>
+                  <a:schemeClr val="dk1"/>
+                </a:solidFill>
+                <a:effectLst/>
+                <a:uFillTx/>
+                <a:latin typeface="Calibri"/>
+              </a:rPr>
+              <a:t>Automatización de flujos de trabajo paramétricos con MATLAB/Python, reducción del 40% en tiempo de preparación.</a:t>
+            </a:r>
+            <a:endParaRPr lang="de-DE" sz="1000" b="0" u="none" strike="noStrike">
+              <a:solidFill>
+                <a:srgbClr val="000000"/>
+              </a:solidFill>
+              <a:effectLst/>
+              <a:uFillTx/>
+              <a:latin typeface="Arial"/>
+            </a:endParaRPr>
+          </a:p>
+        </p:txBody>
+      </p:sp>
+      <p:sp>
+        <p:nvSpPr>
+          <p:cNvPr id="75" name="TextBox 6"/>
+          <p:cNvSpPr/>
+          <p:nvPr/>
+        </p:nvSpPr>
+        <p:spPr>
+          <a:xfrm>
+            <a:off x="377640" y="2693880"/>
+            <a:ext cx="6803640" cy="258120"/>
+          </a:xfrm>
+          <a:prstGeom prst="rect">
+            <a:avLst/>
+          </a:prstGeom>
+          <a:noFill/>
+          <a:ln w="0">
+            <a:noFill/>
+          </a:ln>
+        </p:spPr>
+        <p:style>
+          <a:lnRef idx="0"/>
+          <a:fillRef idx="0"/>
+          <a:effectRef idx="0"/>
+          <a:fontRef idx="minor"/>
+        </p:style>
+        <p:txBody>
+          <a:bodyPr lIns="90000" rIns="90000" tIns="45000" bIns="45000" anchor="t">
+            <a:spAutoFit/>
+          </a:bodyPr>
+          <a:p>
+            <a:pPr defTabSz="457200">
+              <a:lnSpc>
+                <a:spcPct val="100000"/>
+              </a:lnSpc>
+            </a:pPr>
+            <a:r>
+              <a:rPr lang="en-US" sz="1100" b="1" u="none" strike="noStrike">
+                <a:solidFill>
+                  <a:schemeClr val="dk1"/>
+                </a:solidFill>
+                <a:effectLst/>
+                <a:uFillTx/>
+                <a:latin typeface="Calibri"/>
+              </a:rPr>
+              <a:t>Ingeniero CFD en Prácticas - Siemens Energy  |  Madrid, España  |  Jun 2022 - Ago 2022</a:t>
+            </a:r>
+            <a:endParaRPr lang="de-DE" sz="1100" b="0" u="none" strike="noStrike">
+              <a:solidFill>
+                <a:srgbClr val="000000"/>
+              </a:solidFill>
+              <a:effectLst/>
+              <a:uFillTx/>
+              <a:latin typeface="Arial"/>
+            </a:endParaRPr>
+          </a:p>
+        </p:txBody>
+      </p:sp>
+      <p:sp>
+        <p:nvSpPr>
+          <p:cNvPr id="76" name="TextBox 7"/>
+          <p:cNvSpPr/>
+          <p:nvPr/>
+        </p:nvSpPr>
+        <p:spPr>
+          <a:xfrm>
+            <a:off x="528840" y="3149640"/>
+            <a:ext cx="6652440" cy="243000"/>
+          </a:xfrm>
+          <a:prstGeom prst="rect">
+            <a:avLst/>
+          </a:prstGeom>
+          <a:noFill/>
+          <a:ln w="0">
+            <a:noFill/>
+          </a:ln>
+        </p:spPr>
+        <p:style>
+          <a:lnRef idx="0"/>
+          <a:fillRef idx="0"/>
+          <a:effectRef idx="0"/>
+          <a:fontRef idx="minor"/>
+        </p:style>
+        <p:txBody>
+          <a:bodyPr lIns="90000" rIns="90000" tIns="45000" bIns="45000" anchor="t">
+            <a:spAutoFit/>
+          </a:bodyPr>
+          <a:p>
+            <a:pPr defTabSz="457200">
+              <a:lnSpc>
+                <a:spcPct val="100000"/>
+              </a:lnSpc>
+            </a:pPr>
+            <a:r>
+              <a:rPr lang="en-US" sz="1000" b="0" u="none" strike="noStrike">
+                <a:solidFill>
+                  <a:schemeClr val="dk1"/>
+                </a:solidFill>
+                <a:effectLst/>
+                <a:uFillTx/>
+                <a:latin typeface="Calibri"/>
+              </a:rPr>
+              <a:t>Realización de simulaciones CFD estacionarias y transitorias de canales de refrigeración de turbinas de gas.</a:t>
+            </a:r>
+            <a:endParaRPr lang="de-DE" sz="1000" b="0" u="none" strike="noStrike">
+              <a:solidFill>
+                <a:srgbClr val="000000"/>
+              </a:solidFill>
+              <a:effectLst/>
+              <a:uFillTx/>
+              <a:latin typeface="Arial"/>
+            </a:endParaRPr>
+          </a:p>
+        </p:txBody>
+      </p:sp>
+      <p:sp>
+        <p:nvSpPr>
+          <p:cNvPr id="77" name="TextBox 8"/>
+          <p:cNvSpPr/>
+          <p:nvPr/>
+        </p:nvSpPr>
+        <p:spPr>
+          <a:xfrm>
+            <a:off x="528840" y="3492360"/>
+            <a:ext cx="6652440" cy="243000"/>
+          </a:xfrm>
+          <a:prstGeom prst="rect">
+            <a:avLst/>
+          </a:prstGeom>
+          <a:noFill/>
+          <a:ln w="0">
+            <a:noFill/>
+          </a:ln>
+        </p:spPr>
+        <p:style>
+          <a:lnRef idx="0"/>
+          <a:fillRef idx="0"/>
+          <a:effectRef idx="0"/>
+          <a:fontRef idx="minor"/>
+        </p:style>
+        <p:txBody>
+          <a:bodyPr lIns="90000" rIns="90000" tIns="45000" bIns="45000" anchor="t">
+            <a:spAutoFit/>
+          </a:bodyPr>
+          <a:p>
+            <a:pPr defTabSz="457200">
+              <a:lnSpc>
+                <a:spcPct val="100000"/>
+              </a:lnSpc>
+            </a:pPr>
+            <a:r>
+              <a:rPr lang="en-US" sz="1000" b="0" u="none" strike="noStrike">
+                <a:solidFill>
+                  <a:schemeClr val="dk1"/>
+                </a:solidFill>
+                <a:effectLst/>
+                <a:uFillTx/>
+                <a:latin typeface="Calibri"/>
+              </a:rPr>
+              <a:t>Validación de resultados frente a datos experimentales; desviación media inferior al 5%.</a:t>
+            </a:r>
+            <a:endParaRPr lang="de-DE" sz="1000" b="0" u="none" strike="noStrike">
+              <a:solidFill>
+                <a:srgbClr val="000000"/>
+              </a:solidFill>
+              <a:effectLst/>
+              <a:uFillTx/>
+              <a:latin typeface="Arial"/>
+            </a:endParaRPr>
+          </a:p>
+        </p:txBody>
+      </p:sp>
+      <p:sp>
+        <p:nvSpPr>
+          <p:cNvPr id="78" name="TextBox 9"/>
+          <p:cNvSpPr/>
+          <p:nvPr/>
+        </p:nvSpPr>
+        <p:spPr>
+          <a:xfrm>
+            <a:off x="377640" y="3976920"/>
+            <a:ext cx="6803640" cy="258120"/>
+          </a:xfrm>
+          <a:prstGeom prst="rect">
+            <a:avLst/>
+          </a:prstGeom>
+          <a:noFill/>
+          <a:ln w="0">
+            <a:noFill/>
+          </a:ln>
+        </p:spPr>
+        <p:style>
+          <a:lnRef idx="0"/>
+          <a:fillRef idx="0"/>
+          <a:effectRef idx="0"/>
+          <a:fontRef idx="minor"/>
+        </p:style>
+        <p:txBody>
+          <a:bodyPr lIns="90000" rIns="90000" tIns="45000" bIns="45000" anchor="t">
+            <a:spAutoFit/>
+          </a:bodyPr>
+          <a:p>
+            <a:pPr defTabSz="457200">
+              <a:lnSpc>
+                <a:spcPct val="100000"/>
+              </a:lnSpc>
+            </a:pPr>
+            <a:r>
+              <a:rPr lang="en-US" sz="1100" b="1" u="none" strike="noStrike">
+                <a:solidFill>
+                  <a:schemeClr val="dk1"/>
+                </a:solidFill>
+                <a:effectLst/>
+                <a:uFillTx/>
+                <a:latin typeface="Calibri"/>
+              </a:rPr>
+              <a:t>Ingeniero de Diseño Mecánico en Prácticas - Gamesa  |  Pamplona, España  |  Jun 2020 - Ago 2020</a:t>
+            </a:r>
+            <a:endParaRPr lang="de-DE" sz="1100" b="0" u="none" strike="noStrike">
+              <a:solidFill>
+                <a:srgbClr val="000000"/>
+              </a:solidFill>
+              <a:effectLst/>
+              <a:uFillTx/>
+              <a:latin typeface="Arial"/>
+            </a:endParaRPr>
+          </a:p>
+        </p:txBody>
+      </p:sp>
+      <p:sp>
+        <p:nvSpPr>
+          <p:cNvPr id="79" name="TextBox 10"/>
+          <p:cNvSpPr/>
+          <p:nvPr/>
+        </p:nvSpPr>
+        <p:spPr>
+          <a:xfrm>
+            <a:off x="528840" y="4432680"/>
+            <a:ext cx="6652440" cy="243000"/>
+          </a:xfrm>
+          <a:prstGeom prst="rect">
+            <a:avLst/>
+          </a:prstGeom>
+          <a:noFill/>
+          <a:ln w="0">
+            <a:noFill/>
+          </a:ln>
+        </p:spPr>
+        <p:style>
+          <a:lnRef idx="0"/>
+          <a:fillRef idx="0"/>
+          <a:effectRef idx="0"/>
+          <a:fontRef idx="minor"/>
+        </p:style>
+        <p:txBody>
+          <a:bodyPr lIns="90000" rIns="90000" tIns="45000" bIns="45000" anchor="t">
+            <a:spAutoFit/>
+          </a:bodyPr>
+          <a:p>
+            <a:pPr defTabSz="457200">
+              <a:lnSpc>
+                <a:spcPct val="100000"/>
+              </a:lnSpc>
+            </a:pPr>
+            <a:r>
+              <a:rPr lang="en-US" sz="1000" b="0" u="none" strike="noStrike">
+                <a:solidFill>
+                  <a:schemeClr val="dk1"/>
+                </a:solidFill>
+                <a:effectLst/>
+                <a:uFillTx/>
+                <a:latin typeface="Calibri"/>
+              </a:rPr>
+              <a:t>Asistencia en el análisis estructural de componentes de góndolas con ANSYS Mechanical.</a:t>
+            </a:r>
+            <a:endParaRPr lang="de-DE" sz="1000" b="0" u="none" strike="noStrike">
+              <a:solidFill>
+                <a:srgbClr val="000000"/>
+              </a:solidFill>
+              <a:effectLst/>
+              <a:uFillTx/>
+              <a:latin typeface="Arial"/>
+            </a:endParaRPr>
+          </a:p>
+        </p:txBody>
+      </p:sp>
+      <p:sp>
+        <p:nvSpPr>
+          <p:cNvPr id="80" name="TextBox 11"/>
+          <p:cNvSpPr/>
+          <p:nvPr/>
+        </p:nvSpPr>
+        <p:spPr>
+          <a:xfrm>
+            <a:off x="528840" y="4775400"/>
+            <a:ext cx="6652440" cy="243000"/>
+          </a:xfrm>
+          <a:prstGeom prst="rect">
+            <a:avLst/>
+          </a:prstGeom>
+          <a:noFill/>
+          <a:ln w="0">
+            <a:noFill/>
+          </a:ln>
+        </p:spPr>
+        <p:style>
+          <a:lnRef idx="0"/>
+          <a:fillRef idx="0"/>
+          <a:effectRef idx="0"/>
+          <a:fontRef idx="minor"/>
+        </p:style>
+        <p:txBody>
+          <a:bodyPr lIns="90000" rIns="90000" tIns="45000" bIns="45000" anchor="t">
+            <a:spAutoFit/>
+          </a:bodyPr>
+          <a:p>
+            <a:pPr defTabSz="457200">
+              <a:lnSpc>
+                <a:spcPct val="100000"/>
+              </a:lnSpc>
+            </a:pPr>
+            <a:r>
+              <a:rPr lang="en-US" sz="1000" b="0" u="none" strike="noStrike">
+                <a:solidFill>
+                  <a:schemeClr val="dk1"/>
+                </a:solidFill>
+                <a:effectLst/>
+                <a:uFillTx/>
+                <a:latin typeface="Calibri"/>
+              </a:rPr>
+              <a:t>Diseño y modelado CAD 3D de subconjuntos de transmisión en SolidWorks.</a:t>
+            </a:r>
+            <a:endParaRPr lang="de-DE" sz="1000" b="0" u="none" strike="noStrike">
+              <a:solidFill>
+                <a:srgbClr val="000000"/>
+              </a:solidFill>
+              <a:effectLst/>
+              <a:uFillTx/>
+              <a:latin typeface="Arial"/>
+            </a:endParaRPr>
+          </a:p>
+        </p:txBody>
+      </p:sp>
+      <p:sp>
+        <p:nvSpPr>
+          <p:cNvPr id="81" name="TextBox 12"/>
+          <p:cNvSpPr/>
+          <p:nvPr/>
+        </p:nvSpPr>
+        <p:spPr>
+          <a:xfrm>
+            <a:off x="377640" y="5260320"/>
+            <a:ext cx="1029600" cy="334080"/>
+          </a:xfrm>
+          <a:prstGeom prst="rect">
+            <a:avLst/>
+          </a:prstGeom>
+          <a:noFill/>
+          <a:ln w="0">
+            <a:noFill/>
+          </a:ln>
+        </p:spPr>
+        <p:style>
+          <a:lnRef idx="0"/>
+          <a:fillRef idx="0"/>
+          <a:effectRef idx="0"/>
+          <a:fontRef idx="minor"/>
+        </p:style>
+        <p:txBody>
+          <a:bodyPr wrap="none" lIns="90000" rIns="90000" tIns="45000" bIns="45000" anchor="t">
+            <a:spAutoFit/>
+          </a:bodyPr>
+          <a:p>
+            <a:pPr defTabSz="457200">
+              <a:lnSpc>
+                <a:spcPct val="100000"/>
+              </a:lnSpc>
+            </a:pPr>
+            <a:r>
+              <a:rPr lang="en-US" sz="1600" b="1" u="none" strike="noStrike">
+                <a:solidFill>
+                  <a:schemeClr val="dk1"/>
+                </a:solidFill>
+                <a:effectLst/>
+                <a:uFillTx/>
+                <a:latin typeface="Calibri"/>
+              </a:rPr>
+              <a:t>Educación</a:t>
+            </a:r>
+            <a:endParaRPr lang="de-DE" sz="1600" b="0" u="none" strike="noStrike">
+              <a:solidFill>
+                <a:srgbClr val="000000"/>
+              </a:solidFill>
+              <a:effectLst/>
+              <a:uFillTx/>
+              <a:latin typeface="Arial"/>
+            </a:endParaRPr>
+          </a:p>
+        </p:txBody>
+      </p:sp>
+      <p:sp>
+        <p:nvSpPr>
+          <p:cNvPr id="82" name="TextBox 13"/>
+          <p:cNvSpPr/>
+          <p:nvPr/>
+        </p:nvSpPr>
+        <p:spPr>
+          <a:xfrm>
+            <a:off x="377640" y="5901480"/>
+            <a:ext cx="6803640" cy="425160"/>
+          </a:xfrm>
+          <a:prstGeom prst="rect">
+            <a:avLst/>
+          </a:prstGeom>
+          <a:noFill/>
+          <a:ln w="0">
+            <a:noFill/>
+          </a:ln>
+        </p:spPr>
+        <p:style>
+          <a:lnRef idx="0"/>
+          <a:fillRef idx="0"/>
+          <a:effectRef idx="0"/>
+          <a:fontRef idx="minor"/>
+        </p:style>
+        <p:txBody>
+          <a:bodyPr lIns="90000" rIns="90000" tIns="45000" bIns="45000" anchor="t">
+            <a:spAutoFit/>
+          </a:bodyPr>
+          <a:p>
+            <a:pPr defTabSz="457200">
+              <a:lnSpc>
+                <a:spcPct val="100000"/>
+              </a:lnSpc>
+            </a:pPr>
+            <a:r>
+              <a:rPr lang="en-US" sz="1100" b="1" u="none" strike="noStrike">
+                <a:solidFill>
+                  <a:schemeClr val="dk1"/>
+                </a:solidFill>
+                <a:effectLst/>
+                <a:uFillTx/>
+                <a:latin typeface="Calibri"/>
+              </a:rPr>
+              <a:t>Máster Universitario en Ingeniería Mecánica (M.Sc.) - Universidad Politécnica de Madrid (UPM) - Sep 2021 - Jun 2023</a:t>
+            </a:r>
+            <a:endParaRPr lang="de-DE" sz="1100" b="0" u="none" strike="noStrike">
+              <a:solidFill>
+                <a:srgbClr val="000000"/>
+              </a:solidFill>
+              <a:effectLst/>
+              <a:uFillTx/>
+              <a:latin typeface="Arial"/>
+            </a:endParaRPr>
+          </a:p>
+        </p:txBody>
+      </p:sp>
+      <p:sp>
+        <p:nvSpPr>
+          <p:cNvPr id="83" name="TextBox 14"/>
+          <p:cNvSpPr/>
+          <p:nvPr/>
+        </p:nvSpPr>
+        <p:spPr>
+          <a:xfrm>
+            <a:off x="528840" y="6300720"/>
+            <a:ext cx="1092600" cy="243000"/>
+          </a:xfrm>
+          <a:prstGeom prst="rect">
+            <a:avLst/>
+          </a:prstGeom>
+          <a:noFill/>
+          <a:ln w="0">
+            <a:noFill/>
+          </a:ln>
+        </p:spPr>
+        <p:style>
+          <a:lnRef idx="0"/>
+          <a:fillRef idx="0"/>
+          <a:effectRef idx="0"/>
+          <a:fontRef idx="minor"/>
+        </p:style>
+        <p:txBody>
+          <a:bodyPr wrap="none" lIns="90000" rIns="90000" tIns="45000" bIns="45000" anchor="t">
+            <a:spAutoFit/>
+          </a:bodyPr>
+          <a:p>
+            <a:pPr defTabSz="457200">
+              <a:lnSpc>
+                <a:spcPct val="100000"/>
+              </a:lnSpc>
+            </a:pPr>
+            <a:r>
+              <a:rPr lang="en-US" sz="1000" b="0" i="1" u="none" strike="noStrike">
+                <a:solidFill>
+                  <a:schemeClr val="dk1"/>
+                </a:solidFill>
+                <a:effectLst/>
+                <a:uFillTx/>
+                <a:latin typeface="Calibri"/>
+              </a:rPr>
+              <a:t>[master_subjects]</a:t>
+            </a:r>
+            <a:endParaRPr lang="de-DE" sz="1000" b="0" u="none" strike="noStrike">
+              <a:solidFill>
+                <a:srgbClr val="000000"/>
+              </a:solidFill>
+              <a:effectLst/>
+              <a:uFillTx/>
+              <a:latin typeface="Arial"/>
+            </a:endParaRPr>
+          </a:p>
+        </p:txBody>
+      </p:sp>
+      <p:sp>
+        <p:nvSpPr>
+          <p:cNvPr id="84" name="TextBox 15"/>
+          <p:cNvSpPr/>
+          <p:nvPr/>
+        </p:nvSpPr>
+        <p:spPr>
+          <a:xfrm>
+            <a:off x="377640" y="6699600"/>
+            <a:ext cx="6803640" cy="258120"/>
+          </a:xfrm>
+          <a:prstGeom prst="rect">
+            <a:avLst/>
+          </a:prstGeom>
+          <a:noFill/>
+          <a:ln w="0">
+            <a:noFill/>
+          </a:ln>
+        </p:spPr>
+        <p:style>
+          <a:lnRef idx="0"/>
+          <a:fillRef idx="0"/>
+          <a:effectRef idx="0"/>
+          <a:fontRef idx="minor"/>
+        </p:style>
+        <p:txBody>
+          <a:bodyPr lIns="90000" rIns="90000" tIns="45000" bIns="45000" anchor="t">
+            <a:spAutoFit/>
+          </a:bodyPr>
+          <a:p>
+            <a:pPr defTabSz="457200">
+              <a:lnSpc>
+                <a:spcPct val="100000"/>
+              </a:lnSpc>
+            </a:pPr>
+            <a:r>
+              <a:rPr lang="en-US" sz="1100" b="1" u="none" strike="noStrike">
+                <a:solidFill>
+                  <a:schemeClr val="dk1"/>
+                </a:solidFill>
+                <a:effectLst/>
+                <a:uFillTx/>
+                <a:latin typeface="Calibri"/>
+              </a:rPr>
+              <a:t>Grado en Ingeniería Mecánica (B.Sc.) - Universidad de Sevilla - Sep 2016 - Jun 2020</a:t>
+            </a:r>
+            <a:endParaRPr lang="de-DE" sz="1100" b="0" u="none" strike="noStrike">
+              <a:solidFill>
+                <a:srgbClr val="000000"/>
+              </a:solidFill>
+              <a:effectLst/>
+              <a:uFillTx/>
+              <a:latin typeface="Arial"/>
+            </a:endParaRPr>
+          </a:p>
+        </p:txBody>
+      </p:sp>
+      <p:sp>
+        <p:nvSpPr>
+          <p:cNvPr id="85" name="TextBox 16"/>
+          <p:cNvSpPr/>
+          <p:nvPr/>
+        </p:nvSpPr>
+        <p:spPr>
+          <a:xfrm>
+            <a:off x="528840" y="7098480"/>
+            <a:ext cx="1180080" cy="243000"/>
+          </a:xfrm>
+          <a:prstGeom prst="rect">
+            <a:avLst/>
+          </a:prstGeom>
+          <a:noFill/>
+          <a:ln w="0">
+            <a:noFill/>
+          </a:ln>
+        </p:spPr>
+        <p:style>
+          <a:lnRef idx="0"/>
+          <a:fillRef idx="0"/>
+          <a:effectRef idx="0"/>
+          <a:fontRef idx="minor"/>
+        </p:style>
+        <p:txBody>
+          <a:bodyPr wrap="none" lIns="90000" rIns="90000" tIns="45000" bIns="45000" anchor="t">
+            <a:spAutoFit/>
+          </a:bodyPr>
+          <a:p>
+            <a:pPr defTabSz="457200">
+              <a:lnSpc>
+                <a:spcPct val="100000"/>
+              </a:lnSpc>
+            </a:pPr>
+            <a:r>
+              <a:rPr lang="en-US" sz="1000" b="0" i="1" u="none" strike="noStrike">
+                <a:solidFill>
+                  <a:schemeClr val="dk1"/>
+                </a:solidFill>
+                <a:effectLst/>
+                <a:uFillTx/>
+                <a:latin typeface="Calibri"/>
+              </a:rPr>
+              <a:t>[bachelor_subjects]</a:t>
+            </a:r>
+            <a:endParaRPr lang="de-DE" sz="1000" b="0" u="none" strike="noStrike">
+              <a:solidFill>
+                <a:srgbClr val="000000"/>
+              </a:solidFill>
+              <a:effectLst/>
+              <a:uFillTx/>
+              <a:latin typeface="Arial"/>
+            </a:endParaRPr>
+          </a:p>
+        </p:txBody>
+      </p:sp>
+      <p:sp>
+        <p:nvSpPr>
+          <p:cNvPr id="86" name="TextBox 17"/>
+          <p:cNvSpPr/>
+          <p:nvPr/>
+        </p:nvSpPr>
+        <p:spPr>
+          <a:xfrm>
+            <a:off x="377640" y="7498080"/>
+            <a:ext cx="2178000" cy="334080"/>
+          </a:xfrm>
+          <a:prstGeom prst="rect">
+            <a:avLst/>
+          </a:prstGeom>
+          <a:noFill/>
+          <a:ln w="0">
+            <a:noFill/>
+          </a:ln>
+        </p:spPr>
+        <p:style>
+          <a:lnRef idx="0"/>
+          <a:fillRef idx="0"/>
+          <a:effectRef idx="0"/>
+          <a:fontRef idx="minor"/>
+        </p:style>
+        <p:txBody>
+          <a:bodyPr wrap="none" lIns="90000" rIns="90000" tIns="45000" bIns="45000" anchor="t">
+            <a:spAutoFit/>
+          </a:bodyPr>
+          <a:p>
+            <a:pPr defTabSz="457200">
+              <a:lnSpc>
+                <a:spcPct val="100000"/>
+              </a:lnSpc>
+            </a:pPr>
+            <a:r>
+              <a:rPr lang="en-US" sz="1600" b="1" u="none" strike="noStrike">
+                <a:solidFill>
+                  <a:schemeClr val="dk1"/>
+                </a:solidFill>
+                <a:effectLst/>
+                <a:uFillTx/>
+                <a:latin typeface="Calibri"/>
+              </a:rPr>
+              <a:t>Habilidades y Proyectos</a:t>
+            </a:r>
+            <a:endParaRPr lang="de-DE" sz="1600" b="0" u="none" strike="noStrike">
+              <a:solidFill>
+                <a:srgbClr val="000000"/>
+              </a:solidFill>
+              <a:effectLst/>
+              <a:uFillTx/>
+              <a:latin typeface="Arial"/>
+            </a:endParaRPr>
+          </a:p>
+        </p:txBody>
+      </p:sp>
+      <p:sp>
+        <p:nvSpPr>
+          <p:cNvPr id="87" name="TextBox 18"/>
+          <p:cNvSpPr/>
+          <p:nvPr/>
+        </p:nvSpPr>
+        <p:spPr>
+          <a:xfrm>
+            <a:off x="528840" y="8067960"/>
+            <a:ext cx="6652440" cy="243000"/>
+          </a:xfrm>
+          <a:prstGeom prst="rect">
+            <a:avLst/>
+          </a:prstGeom>
+          <a:noFill/>
+          <a:ln w="0">
+            <a:noFill/>
+          </a:ln>
+        </p:spPr>
+        <p:style>
+          <a:lnRef idx="0"/>
+          <a:fillRef idx="0"/>
+          <a:effectRef idx="0"/>
+          <a:fontRef idx="minor"/>
+        </p:style>
+        <p:txBody>
+          <a:bodyPr lIns="90000" rIns="90000" tIns="45000" bIns="45000" anchor="t">
+            <a:spAutoFit/>
+          </a:bodyPr>
+          <a:p>
+            <a:pPr defTabSz="457200">
+              <a:lnSpc>
+                <a:spcPct val="100000"/>
+              </a:lnSpc>
+            </a:pPr>
+            <a:r>
+              <a:rPr lang="en-US" sz="1000" b="0" u="none" strike="noStrike">
+                <a:solidFill>
+                  <a:schemeClr val="dk1"/>
+                </a:solidFill>
+                <a:effectLst/>
+                <a:uFillTx/>
+                <a:latin typeface="Calibri"/>
+              </a:rPr>
+              <a:t>Experto en ANSYS Fluent, Python, MATLAB y SolidWorks</a:t>
+            </a:r>
+            <a:endParaRPr lang="de-DE" sz="1000" b="0" u="none" strike="noStrike">
+              <a:solidFill>
+                <a:srgbClr val="000000"/>
+              </a:solidFill>
+              <a:effectLst/>
+              <a:uFillTx/>
+              <a:latin typeface="Arial"/>
+            </a:endParaRPr>
+          </a:p>
+        </p:txBody>
+      </p:sp>
+      <p:sp>
+        <p:nvSpPr>
+          <p:cNvPr id="88" name="TextBox 19"/>
+          <p:cNvSpPr/>
+          <p:nvPr/>
+        </p:nvSpPr>
+        <p:spPr>
+          <a:xfrm>
+            <a:off x="528840" y="8410680"/>
+            <a:ext cx="6652440" cy="243000"/>
+          </a:xfrm>
+          <a:prstGeom prst="rect">
+            <a:avLst/>
+          </a:prstGeom>
+          <a:noFill/>
+          <a:ln w="0">
+            <a:noFill/>
+          </a:ln>
+        </p:spPr>
+        <p:style>
+          <a:lnRef idx="0"/>
+          <a:fillRef idx="0"/>
+          <a:effectRef idx="0"/>
+          <a:fontRef idx="minor"/>
+        </p:style>
+        <p:txBody>
+          <a:bodyPr lIns="90000" rIns="90000" tIns="45000" bIns="45000" anchor="t">
+            <a:spAutoFit/>
+          </a:bodyPr>
+          <a:p>
+            <a:pPr defTabSz="457200">
+              <a:lnSpc>
+                <a:spcPct val="100000"/>
+              </a:lnSpc>
+            </a:pPr>
+            <a:r>
+              <a:rPr lang="en-US" sz="1000" b="0" u="none" strike="noStrike">
+                <a:solidFill>
+                  <a:schemeClr val="dk1"/>
+                </a:solidFill>
+                <a:effectLst/>
+                <a:uFillTx/>
+                <a:latin typeface="Calibri"/>
+              </a:rPr>
+              <a:t>Idiomas: Español (Nativo), Inglés (Avanzado C1)</a:t>
+            </a:r>
+            <a:endParaRPr lang="de-DE" sz="1000" b="0" u="none" strike="noStrike">
+              <a:solidFill>
+                <a:srgbClr val="000000"/>
+              </a:solidFill>
+              <a:effectLst/>
+              <a:uFillTx/>
+              <a:latin typeface="Arial"/>
+            </a:endParaRPr>
+          </a:p>
+        </p:txBody>
+      </p:sp>
+      <p:sp>
+        <p:nvSpPr>
+          <p:cNvPr id="89" name="TextBox 20"/>
+          <p:cNvSpPr/>
+          <p:nvPr/>
+        </p:nvSpPr>
+        <p:spPr>
+          <a:xfrm>
+            <a:off x="528840" y="8752680"/>
+            <a:ext cx="6652440" cy="243000"/>
+          </a:xfrm>
+          <a:prstGeom prst="rect">
+            <a:avLst/>
+          </a:prstGeom>
+          <a:noFill/>
+          <a:ln w="0">
+            <a:noFill/>
+          </a:ln>
+        </p:spPr>
+        <p:style>
+          <a:lnRef idx="0"/>
+          <a:fillRef idx="0"/>
+          <a:effectRef idx="0"/>
+          <a:fontRef idx="minor"/>
+        </p:style>
+        <p:txBody>
+          <a:bodyPr lIns="90000" rIns="90000" tIns="45000" bIns="45000" anchor="t">
+            <a:spAutoFit/>
+          </a:bodyPr>
+          <a:p>
+            <a:pPr defTabSz="457200">
+              <a:lnSpc>
+                <a:spcPct val="100000"/>
+              </a:lnSpc>
+            </a:pPr>
+            <a:r>
+              <a:rPr lang="en-US" sz="1000" b="0" u="none" strike="noStrike">
+                <a:solidFill>
+                  <a:schemeClr val="dk1"/>
+                </a:solidFill>
+                <a:effectLst/>
+                <a:uFillTx/>
+                <a:latin typeface="Calibri"/>
+              </a:rPr>
+              <a:t>Optimización de estelas en parques eólicos de eje vertical (Tesis de Máster)</a:t>
+            </a:r>
+            <a:endParaRPr lang="de-DE" sz="1000" b="0" u="none" strike="noStrike">
+              <a:solidFill>
+                <a:srgbClr val="000000"/>
+              </a:solidFill>
+              <a:effectLst/>
+              <a:uFillTx/>
+              <a:latin typeface="Arial"/>
+            </a:endParaRPr>
+          </a:p>
+        </p:txBody>
+      </p:sp>
+      <p:sp>
+        <p:nvSpPr>
+          <p:cNvPr id="90" name="TextBox 21"/>
+          <p:cNvSpPr/>
+          <p:nvPr/>
+        </p:nvSpPr>
+        <p:spPr>
+          <a:xfrm>
+            <a:off x="528840" y="9094320"/>
+            <a:ext cx="6652440" cy="243000"/>
+          </a:xfrm>
+          <a:prstGeom prst="rect">
+            <a:avLst/>
+          </a:prstGeom>
+          <a:noFill/>
+          <a:ln w="0">
+            <a:noFill/>
+          </a:ln>
+        </p:spPr>
+        <p:style>
+          <a:lnRef idx="0"/>
+          <a:fillRef idx="0"/>
+          <a:effectRef idx="0"/>
+          <a:fontRef idx="minor"/>
+        </p:style>
+        <p:txBody>
+          <a:bodyPr lIns="90000" rIns="90000" tIns="45000" bIns="45000" anchor="t">
+            <a:spAutoFit/>
+          </a:bodyPr>
+          <a:p>
+            <a:pPr defTabSz="457200">
+              <a:lnSpc>
+                <a:spcPct val="100000"/>
+              </a:lnSpc>
+            </a:pPr>
+            <a:r>
+              <a:rPr lang="en-US" sz="1000" b="0" u="none" strike="noStrike">
+                <a:solidFill>
+                  <a:schemeClr val="dk1"/>
+                </a:solidFill>
+                <a:effectLst/>
+                <a:uFillTx/>
+                <a:latin typeface="Calibri"/>
+              </a:rPr>
+              <a:t>Bomba de agua solar para comunidades rurales (Trabajo Fin de Grado)</a:t>
+            </a:r>
+            <a:endParaRPr lang="de-DE" sz="1000" b="0" u="none" strike="noStrike">
+              <a:solidFill>
+                <a:srgbClr val="000000"/>
+              </a:solidFill>
+              <a:effectLst/>
+              <a:uFillTx/>
+              <a:latin typeface="Arial"/>
             </a:endParaRPr>
           </a:p>
         </p:txBody>

--- a/examples/templates/es/cv_template.pptx
+++ b/examples/templates/es/cv_template.pptx
@@ -6413,7 +6413,7 @@
                 <a:uFillTx/>
                 <a:latin typeface="Calibri"/>
               </a:rPr>
-              <a:t>Juan Pérez</a:t>
+              <a:t>Pepito Perez</a:t>
             </a:r>
             <a:endParaRPr lang="de-DE" sz="1400" b="0" u="none" strike="noStrike">
               <a:solidFill>
@@ -6439,7 +6439,7 @@
                 <a:uFillTx/>
                 <a:latin typeface="Calibri"/>
               </a:rPr>
-              <a:t>Calle de la Industria 27, 4º B, 28045 Madrid, España</a:t>
+              <a:t>742 Maple Avenue, Apt 3B, Cambridge, MA 02139, USA</a:t>
             </a:r>
             <a:endParaRPr lang="de-DE" sz="1100" b="0" u="none" strike="noStrike">
               <a:solidFill>
@@ -6465,7 +6465,7 @@
                 <a:uFillTx/>
                 <a:latin typeface="Calibri"/>
               </a:rPr>
-              <a:t>juan.perez@ejemplo.com  |  +34 612 345 678</a:t>
+              <a:t>pepito.perez@example.com  |  +1 (555) 123-4567</a:t>
             </a:r>
             <a:endParaRPr lang="de-DE" sz="1100" b="0" u="none" strike="noStrike">
               <a:solidFill>
@@ -6491,7 +6491,7 @@
                 <a:uFillTx/>
                 <a:latin typeface="Calibri"/>
               </a:rPr>
-              <a:t>linkedin.com/in/juanperez-ingenieria</a:t>
+              <a:t>linkedin.com/in/johnsmith-mech</a:t>
             </a:r>
             <a:endParaRPr lang="de-DE" sz="1100" b="0" u="none" strike="noStrike">
               <a:solidFill>
@@ -6906,7 +6906,7 @@
                 <a:uFillTx/>
                 <a:latin typeface="Calibri"/>
               </a:rPr>
-              <a:t>Investigador Predoctoral - Laboratorio de CFD y Energías Renovables, UPM  |  Madrid, España  |  Sep 2022 - Jun 2023</a:t>
+              <a:t>Graduate Research Assistant - MIT Renewable Energy CFD Lab  |  Cambridge, MA, USA  |  Sep 2022 - Jun 2023</a:t>
             </a:r>
             <a:endParaRPr lang="de-DE" sz="1100" b="0" u="none" strike="noStrike">
               <a:solidFill>
@@ -6963,7 +6963,7 @@
                 <a:uFillTx/>
                 <a:latin typeface="Calibri"/>
               </a:rPr>
-              <a:t>Desarrollo de modelos CFD Actuator-Line de alta fidelidad para aerogeneradores de eje vertical.</a:t>
+              <a:t>Developed high-fidelity actuator-line CFD models for vertical-axis wind turbines using ANSYS Fluent.</a:t>
             </a:r>
             <a:endParaRPr lang="de-DE" sz="1000" b="0" u="none" strike="noStrike">
               <a:solidFill>
@@ -7020,7 +7020,7 @@
                 <a:uFillTx/>
                 <a:latin typeface="Calibri"/>
               </a:rPr>
-              <a:t>Simulación de interacciones de estela en parques de hasta 12 turbinas; mejora del 15% en densidad de potencia.</a:t>
+              <a:t>Simulated wake interactions in arrays up to 12 turbines, improving array power density by 15%.</a:t>
             </a:r>
             <a:endParaRPr lang="de-DE" sz="1000" b="0" u="none" strike="noStrike">
               <a:solidFill>
@@ -7077,7 +7077,7 @@
                 <a:uFillTx/>
                 <a:latin typeface="Calibri"/>
               </a:rPr>
-              <a:t>Automatización de flujos de trabajo paramétricos con MATLAB/Python, reducción del 40% en tiempo de preparación.</a:t>
+              <a:t>Automated parametric sweep workflows with MATLAB/Python, reducing setup time by 40%.</a:t>
             </a:r>
             <a:endParaRPr lang="de-DE" sz="1000" b="0" u="none" strike="noStrike">
               <a:solidFill>
@@ -7134,7 +7134,7 @@
                 <a:uFillTx/>
                 <a:latin typeface="Calibri"/>
               </a:rPr>
-              <a:t>Ingeniero CFD en Prácticas - Siemens Energy  |  Madrid, España  |  Jun 2022 - Ago 2022</a:t>
+              <a:t>CFD Engineering Intern - Siemens Energy  |  Orlando, FL, USA  |  Jun 2022 - Aug 2022</a:t>
             </a:r>
             <a:endParaRPr lang="de-DE" sz="1100" b="0" u="none" strike="noStrike">
               <a:solidFill>
@@ -7191,7 +7191,7 @@
                 <a:uFillTx/>
                 <a:latin typeface="Calibri"/>
               </a:rPr>
-              <a:t>Realización de simulaciones CFD estacionarias y transitorias de canales de refrigeración de turbinas de gas.</a:t>
+              <a:t>Performed steady-state and transient CFD simulations of gas turbine cooling channels.</a:t>
             </a:r>
             <a:endParaRPr lang="de-DE" sz="1000" b="0" u="none" strike="noStrike">
               <a:solidFill>
@@ -7248,7 +7248,7 @@
                 <a:uFillTx/>
                 <a:latin typeface="Calibri"/>
               </a:rPr>
-              <a:t>Validación de resultados frente a datos experimentales; desviación media inferior al 5%.</a:t>
+              <a:t>Validated simulation results against experimental data with &lt;5% average deviation.</a:t>
             </a:r>
             <a:endParaRPr lang="de-DE" sz="1000" b="0" u="none" strike="noStrike">
               <a:solidFill>
@@ -7305,7 +7305,7 @@
                 <a:uFillTx/>
                 <a:latin typeface="Calibri"/>
               </a:rPr>
-              <a:t>Ingeniero de Diseño Mecánico en Prácticas - Gamesa  |  Pamplona, España  |  Jun 2020 - Ago 2020</a:t>
+              <a:t>Mechanical Design Intern - Vestas Wind Systems  |  Portland, OR, USA  |  Jun 2020 - Aug 2020</a:t>
             </a:r>
             <a:endParaRPr lang="de-DE" sz="1100" b="0" u="none" strike="noStrike">
               <a:solidFill>
@@ -7362,7 +7362,7 @@
                 <a:uFillTx/>
                 <a:latin typeface="Calibri"/>
               </a:rPr>
-              <a:t>Asistencia en el análisis estructural de componentes de góndolas con ANSYS Mechanical.</a:t>
+              <a:t>Assisted in structural analysis of wind turbine nacelle components using ANSYS Mechanical.</a:t>
             </a:r>
             <a:endParaRPr lang="de-DE" sz="1000" b="0" u="none" strike="noStrike">
               <a:solidFill>
@@ -7419,7 +7419,7 @@
                 <a:uFillTx/>
                 <a:latin typeface="Calibri"/>
               </a:rPr>
-              <a:t>Diseño y modelado CAD 3D de subconjuntos de transmisión en SolidWorks.</a:t>
+              <a:t>Designed 3D CAD models of drivetrain sub-assemblies in SolidWorks.</a:t>
             </a:r>
             <a:endParaRPr lang="de-DE" sz="1000" b="0" u="none" strike="noStrike">
               <a:solidFill>
@@ -7533,7 +7533,7 @@
                 <a:uFillTx/>
                 <a:latin typeface="Calibri"/>
               </a:rPr>
-              <a:t>Máster Universitario en Ingeniería Mecánica (M.Sc.) - Universidad Politécnica de Madrid (UPM) - Sep 2021 - Jun 2023</a:t>
+              <a:t>Master of Science in Mechanical Engineering - Massachusetts Institute of Technology (MIT) - Sep 2021 - Jun 2023</a:t>
             </a:r>
             <a:endParaRPr lang="de-DE" sz="1100" b="0" u="none" strike="noStrike">
               <a:solidFill>
@@ -7647,7 +7647,7 @@
                 <a:uFillTx/>
                 <a:latin typeface="Calibri"/>
               </a:rPr>
-              <a:t>Grado en Ingeniería Mecánica (B.Sc.) - Universidad de Sevilla - Sep 2016 - Jun 2020</a:t>
+              <a:t>Bachelor of Science in Mechanical Engineering - University of Michigan - Sep 2016 - May 2020</a:t>
             </a:r>
             <a:endParaRPr lang="de-DE" sz="1100" b="0" u="none" strike="noStrike">
               <a:solidFill>
@@ -7818,7 +7818,7 @@
                 <a:uFillTx/>
                 <a:latin typeface="Calibri"/>
               </a:rPr>
-              <a:t>Experto en ANSYS Fluent, Python, MATLAB y SolidWorks</a:t>
+              <a:t>Expert in ANSYS Fluent, Python, MATLAB, and SolidWorks</a:t>
             </a:r>
             <a:endParaRPr lang="de-DE" sz="1000" b="0" u="none" strike="noStrike">
               <a:solidFill>
@@ -7875,7 +7875,7 @@
                 <a:uFillTx/>
                 <a:latin typeface="Calibri"/>
               </a:rPr>
-              <a:t>Idiomas: Español (Nativo), Inglés (Avanzado C1)</a:t>
+              <a:t>Languages: English (Native), German (Intermediate B1)</a:t>
             </a:r>
             <a:endParaRPr lang="de-DE" sz="1000" b="0" u="none" strike="noStrike">
               <a:solidFill>
@@ -7932,7 +7932,7 @@
                 <a:uFillTx/>
                 <a:latin typeface="Calibri"/>
               </a:rPr>
-              <a:t>Optimización de estelas en parques eólicos de eje vertical (Tesis de Máster)</a:t>
+              <a:t>VAWT Array Wake Optimization (Master's Thesis)</a:t>
             </a:r>
             <a:endParaRPr lang="de-DE" sz="1000" b="0" u="none" strike="noStrike">
               <a:solidFill>
@@ -7989,7 +7989,7 @@
                 <a:uFillTx/>
                 <a:latin typeface="Calibri"/>
               </a:rPr>
-              <a:t>Bomba de agua solar para comunidades rurales (Trabajo Fin de Grado)</a:t>
+              <a:t>Solar-Powered Water Pump for Rural Communities (B.Sc. Capstone)</a:t>
             </a:r>
             <a:endParaRPr lang="de-DE" sz="1000" b="0" u="none" strike="noStrike">
               <a:solidFill>
